--- a/pitch/VeriLens_Pitch.pptx
+++ b/pitch/VeriLens_Pitch.pptx
@@ -5199,7 +5199,7 @@
                 <a:ea typeface="Calibri" pitchFamily="34" charset="-122"/>
                 <a:cs typeface="Calibri" pitchFamily="34" charset="-120"/>
               </a:rPr>
-              <a:t>Five independent forensic checks run in parallel — synthesis, noise, compression, attestation, face match.</a:t>
+              <a:t>Six independent forensic checks run in parallel — synthesis, noise, compression, attestation, face match, replay detection.</a:t>
             </a:r>
             <a:endParaRPr lang="en-US" sz="1130" dirty="0"/>
           </a:p>
@@ -5648,7 +5648,7 @@
                 <a:ea typeface="Cambria" pitchFamily="34" charset="-122"/>
                 <a:cs typeface="Cambria" pitchFamily="34" charset="-120"/>
               </a:rPr>
-              <a:t>Five independent lanes. One accountable judge.</a:t>
+              <a:t>Six independent lanes. One accountable judge.</a:t>
             </a:r>
             <a:endParaRPr lang="en-US" sz="2800" dirty="0"/>
           </a:p>
@@ -5663,11 +5663,11 @@
         <p:spPr>
           <a:xfrm>
             <a:off x="548640" y="1874520"/>
-            <a:ext cx="1847088" cy="2606040"/>
+            <a:ext cx="1591056" cy="2606040"/>
           </a:xfrm>
           <a:prstGeom prst="roundRect">
             <a:avLst>
-              <a:gd name="adj" fmla="val 4455"/>
+              <a:gd name="adj" fmla="val 5172"/>
             </a:avLst>
           </a:prstGeom>
           <a:solidFill>
@@ -5689,7 +5689,7 @@
         </p:nvSpPr>
         <p:spPr>
           <a:xfrm>
-            <a:off x="1225296" y="2075688"/>
+            <a:off x="1097280" y="2075688"/>
             <a:ext cx="493776" cy="493776"/>
           </a:xfrm>
           <a:prstGeom prst="ellipse">
@@ -5717,7 +5717,7 @@
         </p:blipFill>
         <p:spPr>
           <a:xfrm>
-            <a:off x="1338864" y="2189256"/>
+            <a:off x="1210848" y="2189256"/>
             <a:ext cx="266639" cy="266639"/>
           </a:xfrm>
           <a:prstGeom prst="rect">
@@ -5734,7 +5734,7 @@
         <p:spPr>
           <a:xfrm>
             <a:off x="658368" y="2697480"/>
-            <a:ext cx="1627632" cy="256032"/>
+            <a:ext cx="1371600" cy="256032"/>
           </a:xfrm>
           <a:prstGeom prst="rect">
             <a:avLst/>
@@ -5773,7 +5773,7 @@
         <p:spPr>
           <a:xfrm>
             <a:off x="658368" y="2935224"/>
-            <a:ext cx="1627632" cy="502920"/>
+            <a:ext cx="1371600" cy="502920"/>
           </a:xfrm>
           <a:prstGeom prst="rect">
             <a:avLst/>
@@ -5812,7 +5812,7 @@
         <p:spPr>
           <a:xfrm>
             <a:off x="676656" y="3447288"/>
-            <a:ext cx="1591056" cy="868680"/>
+            <a:ext cx="1335024" cy="868680"/>
           </a:xfrm>
           <a:prstGeom prst="rect">
             <a:avLst/>
@@ -5853,12 +5853,12 @@
         </p:nvSpPr>
         <p:spPr>
           <a:xfrm>
-            <a:off x="2519172" y="1874520"/>
-            <a:ext cx="1847088" cy="2606040"/>
+            <a:off x="2244852" y="1874520"/>
+            <a:ext cx="1591056" cy="2606040"/>
           </a:xfrm>
           <a:prstGeom prst="roundRect">
             <a:avLst>
-              <a:gd name="adj" fmla="val 4455"/>
+              <a:gd name="adj" fmla="val 5172"/>
             </a:avLst>
           </a:prstGeom>
           <a:solidFill>
@@ -5880,7 +5880,7 @@
         </p:nvSpPr>
         <p:spPr>
           <a:xfrm>
-            <a:off x="3195828" y="2075688"/>
+            <a:off x="2793492" y="2075688"/>
             <a:ext cx="493776" cy="493776"/>
           </a:xfrm>
           <a:prstGeom prst="ellipse">
@@ -5908,7 +5908,7 @@
         </p:blipFill>
         <p:spPr>
           <a:xfrm>
-            <a:off x="3309396" y="2189256"/>
+            <a:off x="2907060" y="2189256"/>
             <a:ext cx="266639" cy="266639"/>
           </a:xfrm>
           <a:prstGeom prst="rect">
@@ -5924,8 +5924,8 @@
         </p:nvSpPr>
         <p:spPr>
           <a:xfrm>
-            <a:off x="2628900" y="2697480"/>
-            <a:ext cx="1627632" cy="256032"/>
+            <a:off x="2354580" y="2697480"/>
+            <a:ext cx="1371600" cy="256032"/>
           </a:xfrm>
           <a:prstGeom prst="rect">
             <a:avLst/>
@@ -5963,8 +5963,8 @@
         </p:nvSpPr>
         <p:spPr>
           <a:xfrm>
-            <a:off x="2628900" y="2935224"/>
-            <a:ext cx="1627632" cy="502920"/>
+            <a:off x="2354580" y="2935224"/>
+            <a:ext cx="1371600" cy="502920"/>
           </a:xfrm>
           <a:prstGeom prst="rect">
             <a:avLst/>
@@ -6002,8 +6002,8 @@
         </p:nvSpPr>
         <p:spPr>
           <a:xfrm>
-            <a:off x="2647188" y="3447288"/>
-            <a:ext cx="1591056" cy="868680"/>
+            <a:off x="2372868" y="3447288"/>
+            <a:ext cx="1335024" cy="868680"/>
           </a:xfrm>
           <a:prstGeom prst="rect">
             <a:avLst/>
@@ -6044,12 +6044,12 @@
         </p:nvSpPr>
         <p:spPr>
           <a:xfrm>
-            <a:off x="4489704" y="1874520"/>
-            <a:ext cx="1847088" cy="2606040"/>
+            <a:off x="3941064" y="1874520"/>
+            <a:ext cx="1591056" cy="2606040"/>
           </a:xfrm>
           <a:prstGeom prst="roundRect">
             <a:avLst>
-              <a:gd name="adj" fmla="val 4455"/>
+              <a:gd name="adj" fmla="val 5172"/>
             </a:avLst>
           </a:prstGeom>
           <a:solidFill>
@@ -6071,7 +6071,7 @@
         </p:nvSpPr>
         <p:spPr>
           <a:xfrm>
-            <a:off x="5166360" y="2075688"/>
+            <a:off x="4489704" y="2075688"/>
             <a:ext cx="493776" cy="493776"/>
           </a:xfrm>
           <a:prstGeom prst="ellipse">
@@ -6099,7 +6099,7 @@
         </p:blipFill>
         <p:spPr>
           <a:xfrm>
-            <a:off x="5279928" y="2189256"/>
+            <a:off x="4603272" y="2189256"/>
             <a:ext cx="266639" cy="266639"/>
           </a:xfrm>
           <a:prstGeom prst="rect">
@@ -6115,8 +6115,8 @@
         </p:nvSpPr>
         <p:spPr>
           <a:xfrm>
-            <a:off x="4599432" y="2697480"/>
-            <a:ext cx="1627632" cy="256032"/>
+            <a:off x="4050792" y="2697480"/>
+            <a:ext cx="1371600" cy="256032"/>
           </a:xfrm>
           <a:prstGeom prst="rect">
             <a:avLst/>
@@ -6154,8 +6154,8 @@
         </p:nvSpPr>
         <p:spPr>
           <a:xfrm>
-            <a:off x="4599432" y="2935224"/>
-            <a:ext cx="1627632" cy="502920"/>
+            <a:off x="4050792" y="2935224"/>
+            <a:ext cx="1371600" cy="502920"/>
           </a:xfrm>
           <a:prstGeom prst="rect">
             <a:avLst/>
@@ -6193,8 +6193,8 @@
         </p:nvSpPr>
         <p:spPr>
           <a:xfrm>
-            <a:off x="4617720" y="3447288"/>
-            <a:ext cx="1591056" cy="868680"/>
+            <a:off x="4069080" y="3447288"/>
+            <a:ext cx="1335024" cy="868680"/>
           </a:xfrm>
           <a:prstGeom prst="rect">
             <a:avLst/>
@@ -6235,12 +6235,12 @@
         </p:nvSpPr>
         <p:spPr>
           <a:xfrm>
-            <a:off x="6460236" y="1874520"/>
-            <a:ext cx="1847088" cy="2606040"/>
+            <a:off x="5637276" y="1874520"/>
+            <a:ext cx="1591056" cy="2606040"/>
           </a:xfrm>
           <a:prstGeom prst="roundRect">
             <a:avLst>
-              <a:gd name="adj" fmla="val 4455"/>
+              <a:gd name="adj" fmla="val 5172"/>
             </a:avLst>
           </a:prstGeom>
           <a:solidFill>
@@ -6262,7 +6262,7 @@
         </p:nvSpPr>
         <p:spPr>
           <a:xfrm>
-            <a:off x="7136892" y="2075688"/>
+            <a:off x="6185916" y="2075688"/>
             <a:ext cx="493776" cy="493776"/>
           </a:xfrm>
           <a:prstGeom prst="ellipse">
@@ -6290,7 +6290,7 @@
         </p:blipFill>
         <p:spPr>
           <a:xfrm>
-            <a:off x="7250460" y="2189256"/>
+            <a:off x="6299484" y="2189256"/>
             <a:ext cx="266639" cy="266639"/>
           </a:xfrm>
           <a:prstGeom prst="rect">
@@ -6306,8 +6306,8 @@
         </p:nvSpPr>
         <p:spPr>
           <a:xfrm>
-            <a:off x="6569964" y="2697480"/>
-            <a:ext cx="1627632" cy="256032"/>
+            <a:off x="5747004" y="2697480"/>
+            <a:ext cx="1371600" cy="256032"/>
           </a:xfrm>
           <a:prstGeom prst="rect">
             <a:avLst/>
@@ -6345,8 +6345,8 @@
         </p:nvSpPr>
         <p:spPr>
           <a:xfrm>
-            <a:off x="6569964" y="2935224"/>
-            <a:ext cx="1627632" cy="502920"/>
+            <a:off x="5747004" y="2935224"/>
+            <a:ext cx="1371600" cy="502920"/>
           </a:xfrm>
           <a:prstGeom prst="rect">
             <a:avLst/>
@@ -6384,8 +6384,8 @@
         </p:nvSpPr>
         <p:spPr>
           <a:xfrm>
-            <a:off x="6588252" y="3447288"/>
-            <a:ext cx="1591056" cy="868680"/>
+            <a:off x="5765292" y="3447288"/>
+            <a:ext cx="1335024" cy="868680"/>
           </a:xfrm>
           <a:prstGeom prst="rect">
             <a:avLst/>
@@ -6412,7 +6412,7 @@
                 <a:ea typeface="Calibri" pitchFamily="34" charset="-122"/>
                 <a:cs typeface="Calibri" pitchFamily="34" charset="-120"/>
               </a:rPr>
-              <a:t>Live camera vs. upload. Raises confidence only — never counted as evidence of fakery.</a:t>
+              <a:t>Signed, single-use nonce proves live capture — absence is never evidence of fakery.</a:t>
             </a:r>
             <a:endParaRPr lang="en-US" sz="900" dirty="0"/>
           </a:p>
@@ -6426,12 +6426,12 @@
         </p:nvSpPr>
         <p:spPr>
           <a:xfrm>
-            <a:off x="8430768" y="1874520"/>
-            <a:ext cx="1847088" cy="2606040"/>
+            <a:off x="7333488" y="1874520"/>
+            <a:ext cx="1591056" cy="2606040"/>
           </a:xfrm>
           <a:prstGeom prst="roundRect">
             <a:avLst>
-              <a:gd name="adj" fmla="val 4455"/>
+              <a:gd name="adj" fmla="val 5172"/>
             </a:avLst>
           </a:prstGeom>
           <a:solidFill>
@@ -6453,7 +6453,7 @@
         </p:nvSpPr>
         <p:spPr>
           <a:xfrm>
-            <a:off x="9107424" y="2075688"/>
+            <a:off x="7882128" y="2075688"/>
             <a:ext cx="493776" cy="493776"/>
           </a:xfrm>
           <a:prstGeom prst="ellipse">
@@ -6481,7 +6481,7 @@
         </p:blipFill>
         <p:spPr>
           <a:xfrm>
-            <a:off x="9220992" y="2189256"/>
+            <a:off x="7995696" y="2189256"/>
             <a:ext cx="266639" cy="266639"/>
           </a:xfrm>
           <a:prstGeom prst="rect">
@@ -6497,8 +6497,8 @@
         </p:nvSpPr>
         <p:spPr>
           <a:xfrm>
-            <a:off x="8540496" y="2697480"/>
-            <a:ext cx="1627632" cy="256032"/>
+            <a:off x="7443216" y="2697480"/>
+            <a:ext cx="1371600" cy="256032"/>
           </a:xfrm>
           <a:prstGeom prst="rect">
             <a:avLst/>
@@ -6536,8 +6536,8 @@
         </p:nvSpPr>
         <p:spPr>
           <a:xfrm>
-            <a:off x="8540496" y="2935224"/>
-            <a:ext cx="1627632" cy="502920"/>
+            <a:off x="7443216" y="2935224"/>
+            <a:ext cx="1371600" cy="502920"/>
           </a:xfrm>
           <a:prstGeom prst="rect">
             <a:avLst/>
@@ -6575,8 +6575,8 @@
         </p:nvSpPr>
         <p:spPr>
           <a:xfrm>
-            <a:off x="8558784" y="3447288"/>
-            <a:ext cx="1591056" cy="868680"/>
+            <a:off x="7461504" y="3447288"/>
+            <a:ext cx="1335024" cy="868680"/>
           </a:xfrm>
           <a:prstGeom prst="rect">
             <a:avLst/>
@@ -6611,7 +6611,198 @@
       </p:sp>
       <p:sp>
         <p:nvSpPr>
-          <p:cNvPr id="34" name="Text 27"/>
+          <p:cNvPr id="34" name="Shape 27"/>
+          <p:cNvSpPr/>
+          <p:nvPr/>
+        </p:nvSpPr>
+        <p:spPr>
+          <a:xfrm>
+            <a:off x="9029700" y="1874520"/>
+            <a:ext cx="1591056" cy="2606040"/>
+          </a:xfrm>
+          <a:prstGeom prst="roundRect">
+            <a:avLst>
+              <a:gd name="adj" fmla="val 5172"/>
+            </a:avLst>
+          </a:prstGeom>
+          <a:solidFill>
+            <a:srgbClr val="1B1B1B"/>
+          </a:solidFill>
+          <a:ln w="9525">
+            <a:solidFill>
+              <a:srgbClr val="2E2E2E"/>
+            </a:solidFill>
+            <a:prstDash val="solid"/>
+          </a:ln>
+        </p:spPr>
+      </p:sp>
+      <p:sp>
+        <p:nvSpPr>
+          <p:cNvPr id="35" name="Shape 28"/>
+          <p:cNvSpPr/>
+          <p:nvPr/>
+        </p:nvSpPr>
+        <p:spPr>
+          <a:xfrm>
+            <a:off x="9578340" y="2075688"/>
+            <a:ext cx="493776" cy="493776"/>
+          </a:xfrm>
+          <a:prstGeom prst="ellipse">
+            <a:avLst/>
+          </a:prstGeom>
+          <a:solidFill>
+            <a:srgbClr val="FFC627"/>
+          </a:solidFill>
+          <a:ln/>
+        </p:spPr>
+      </p:sp>
+      <p:pic>
+        <p:nvPicPr>
+          <p:cNvPr id="36" name="Image 5" descr="/Users/mahadev/Downloads/ProofSnap-main/pitch/icons_yb/mobile_blk.png">    </p:cNvPr>
+          <p:cNvPicPr>
+            <a:picLocks noChangeAspect="1"/>
+          </p:cNvPicPr>
+          <p:nvPr/>
+        </p:nvPicPr>
+        <p:blipFill>
+          <a:blip r:embed="rId6"/>
+          <a:stretch>
+            <a:fillRect/>
+          </a:stretch>
+        </p:blipFill>
+        <p:spPr>
+          <a:xfrm>
+            <a:off x="9691908" y="2189256"/>
+            <a:ext cx="266639" cy="266639"/>
+          </a:xfrm>
+          <a:prstGeom prst="rect">
+            <a:avLst/>
+          </a:prstGeom>
+        </p:spPr>
+      </p:pic>
+      <p:sp>
+        <p:nvSpPr>
+          <p:cNvPr id="37" name="Text 29"/>
+          <p:cNvSpPr txBox="1"/>
+          <p:nvPr/>
+        </p:nvSpPr>
+        <p:spPr>
+          <a:xfrm>
+            <a:off x="9139428" y="2697480"/>
+            <a:ext cx="1371600" cy="256032"/>
+          </a:xfrm>
+          <a:prstGeom prst="rect">
+            <a:avLst/>
+          </a:prstGeom>
+          <a:noFill/>
+          <a:ln/>
+        </p:spPr>
+        <p:txBody>
+          <a:bodyPr wrap="square" lIns="0" tIns="0" rIns="0" bIns="0" rtlCol="0" anchor="ctr"/>
+          <a:lstStyle/>
+          <a:p>
+            <a:pPr algn="ctr" indent="0" marL="0">
+              <a:buNone/>
+            </a:pPr>
+            <a:r>
+              <a:rPr lang="en-US" sz="1000" b="1" spc="100" kern="0" dirty="0">
+                <a:solidFill>
+                  <a:srgbClr val="FFC627"/>
+                </a:solidFill>
+                <a:latin typeface="Calibri" pitchFamily="34" charset="0"/>
+                <a:ea typeface="Calibri" pitchFamily="34" charset="-122"/>
+                <a:cs typeface="Calibri" pitchFamily="34" charset="-120"/>
+              </a:rPr>
+              <a:t>LANE G</a:t>
+            </a:r>
+            <a:endParaRPr lang="en-US" sz="1000" dirty="0"/>
+          </a:p>
+        </p:txBody>
+      </p:sp>
+      <p:sp>
+        <p:nvSpPr>
+          <p:cNvPr id="38" name="Text 30"/>
+          <p:cNvSpPr txBox="1"/>
+          <p:nvPr/>
+        </p:nvSpPr>
+        <p:spPr>
+          <a:xfrm>
+            <a:off x="9139428" y="2935224"/>
+            <a:ext cx="1371600" cy="502920"/>
+          </a:xfrm>
+          <a:prstGeom prst="rect">
+            <a:avLst/>
+          </a:prstGeom>
+          <a:noFill/>
+          <a:ln/>
+        </p:spPr>
+        <p:txBody>
+          <a:bodyPr wrap="square" lIns="0" tIns="0" rIns="0" bIns="0" rtlCol="0" anchor="ctr"/>
+          <a:lstStyle/>
+          <a:p>
+            <a:pPr algn="ctr" indent="0" marL="0">
+              <a:buNone/>
+            </a:pPr>
+            <a:r>
+              <a:rPr lang="en-US" sz="1250" b="1" dirty="0">
+                <a:solidFill>
+                  <a:srgbClr val="FFFFFF"/>
+                </a:solidFill>
+                <a:latin typeface="Calibri" pitchFamily="34" charset="0"/>
+                <a:ea typeface="Calibri" pitchFamily="34" charset="-122"/>
+                <a:cs typeface="Calibri" pitchFamily="34" charset="-120"/>
+              </a:rPr>
+              <a:t>Replay Detection</a:t>
+            </a:r>
+            <a:endParaRPr lang="en-US" sz="1250" dirty="0"/>
+          </a:p>
+        </p:txBody>
+      </p:sp>
+      <p:sp>
+        <p:nvSpPr>
+          <p:cNvPr id="39" name="Text 31"/>
+          <p:cNvSpPr txBox="1"/>
+          <p:nvPr/>
+        </p:nvSpPr>
+        <p:spPr>
+          <a:xfrm>
+            <a:off x="9157716" y="3447288"/>
+            <a:ext cx="1335024" cy="868680"/>
+          </a:xfrm>
+          <a:prstGeom prst="rect">
+            <a:avLst/>
+          </a:prstGeom>
+          <a:noFill/>
+          <a:ln/>
+        </p:spPr>
+        <p:txBody>
+          <a:bodyPr wrap="square" lIns="0" tIns="0" rIns="0" bIns="0" rtlCol="0" anchor="ctr"/>
+          <a:lstStyle/>
+          <a:p>
+            <a:pPr algn="ctr" indent="0" marL="0">
+              <a:lnSpc>
+                <a:spcPct val="115000"/>
+              </a:lnSpc>
+              <a:buNone/>
+            </a:pPr>
+            <a:r>
+              <a:rPr lang="en-US" sz="900" dirty="0">
+                <a:solidFill>
+                  <a:srgbClr val="9A9A9A"/>
+                </a:solidFill>
+                <a:latin typeface="Calibri" pitchFamily="34" charset="0"/>
+                <a:ea typeface="Calibri" pitchFamily="34" charset="-122"/>
+                <a:cs typeface="Calibri" pitchFamily="34" charset="-120"/>
+              </a:rPr>
+              <a:t>Patch-wise frequency analysis catches a screen or printout held up to the camera.</a:t>
+            </a:r>
+            <a:endParaRPr lang="en-US" sz="900" dirty="0"/>
+          </a:p>
+        </p:txBody>
+      </p:sp>
+      <p:sp>
+        <p:nvSpPr>
+          <p:cNvPr id="40" name="Text 32"/>
           <p:cNvSpPr txBox="1"/>
           <p:nvPr/>
         </p:nvSpPr>
@@ -6650,7 +6841,7 @@
       </p:sp>
       <p:sp>
         <p:nvSpPr>
-          <p:cNvPr id="35" name="Shape 28"/>
+          <p:cNvPr id="41" name="Shape 33"/>
           <p:cNvSpPr/>
           <p:nvPr/>
         </p:nvSpPr>
@@ -6672,7 +6863,7 @@
       </p:sp>
       <p:sp>
         <p:nvSpPr>
-          <p:cNvPr id="36" name="Shape 29"/>
+          <p:cNvPr id="42" name="Shape 34"/>
           <p:cNvSpPr/>
           <p:nvPr/>
         </p:nvSpPr>
@@ -6697,14 +6888,14 @@
       </p:sp>
       <p:pic>
         <p:nvPicPr>
-          <p:cNvPr id="37" name="Image 5" descr="/Users/mahadev/Downloads/ProofSnap-main/pitch/icons_yb/scale_wht.png">    </p:cNvPr>
+          <p:cNvPr id="43" name="Image 6" descr="/Users/mahadev/Downloads/ProofSnap-main/pitch/icons_yb/scale_wht.png">    </p:cNvPr>
           <p:cNvPicPr>
             <a:picLocks noChangeAspect="1"/>
           </p:cNvPicPr>
           <p:nvPr/>
         </p:nvPicPr>
         <p:blipFill>
-          <a:blip r:embed="rId6"/>
+          <a:blip r:embed="rId7"/>
           <a:stretch>
             <a:fillRect/>
           </a:stretch>
@@ -6721,7 +6912,7 @@
       </p:pic>
       <p:sp>
         <p:nvSpPr>
-          <p:cNvPr id="38" name="Text 30"/>
+          <p:cNvPr id="44" name="Text 35"/>
           <p:cNvSpPr txBox="1"/>
           <p:nvPr/>
         </p:nvSpPr>
@@ -6760,7 +6951,7 @@
       </p:sp>
       <p:sp>
         <p:nvSpPr>
-          <p:cNvPr id="39" name="Text 31"/>
+          <p:cNvPr id="45" name="Text 36"/>
           <p:cNvSpPr txBox="1"/>
           <p:nvPr/>
         </p:nvSpPr>
@@ -6799,7 +6990,7 @@
       </p:sp>
       <p:sp>
         <p:nvSpPr>
-          <p:cNvPr id="40" name="Text 32"/>
+          <p:cNvPr id="46" name="Text 37"/>
           <p:cNvSpPr txBox="1"/>
           <p:nvPr/>
         </p:nvSpPr>
@@ -10037,7 +10228,7 @@
                 <a:ea typeface="Calibri" pitchFamily="34" charset="-122"/>
                 <a:cs typeface="Calibri" pitchFamily="34" charset="-120"/>
               </a:rPr>
-              <a:t>Attestation unverified server-side</a:t>
+              <a:t>Trained lane still calibrating</a:t>
             </a:r>
             <a:endParaRPr lang="en-US" sz="1200" dirty="0"/>
           </a:p>
@@ -10079,7 +10270,7 @@
                 <a:ea typeface="Calibri" pitchFamily="34" charset="-122"/>
                 <a:cs typeface="Calibri" pitchFamily="34" charset="-120"/>
               </a:rPr>
-              <a:t>Caught mid-build — earns zero confidence bonus until a signed nonce makes it real.</a:t>
+              <a:t>Confidence capped until validated on real-world photos, not just its own training set — a broader retrain is in progress.</a:t>
             </a:r>
             <a:endParaRPr lang="en-US" sz="980" dirty="0"/>
           </a:p>

--- a/pitch/VeriLens_Pitch.pptx
+++ b/pitch/VeriLens_Pitch.pptx
@@ -13,9 +13,10 @@
     <p:sldId id="261" r:id="rId7"/>
     <p:sldId id="262" r:id="rId8"/>
     <p:sldId id="263" r:id="rId9"/>
+    <p:sldId id="264" r:id="rId10"/>
   </p:sldIdLst>
   <p:notesMasterIdLst>
-    <p:notesMasterId r:id="rId10"/>
+    <p:notesMasterId r:id="rId11"/>
   </p:notesMasterIdLst>
   <p:sldSz cx="12192000" cy="6858000"/>
   <p:notesSz cx="6858000" cy="12192000"/>
@@ -1149,6 +1150,94 @@
             <a:fld id="{F7021451-1387-4CA6-816F-3879F97B5CBC}" type="slidenum">
               <a:rPr lang="en-US"/>
               <a:t>8</a:t>
+            </a:fld>
+            <a:endParaRPr lang="en-US"/>
+          </a:p>
+        </p:txBody>
+      </p:sp>
+    </p:spTree>
+    <p:extLst>
+      <p:ext uri="{BB962C8B-B14F-4D97-AF65-F5344CB8AC3E}">
+        <p14:creationId xmlns:p14="http://schemas.microsoft.com/office/powerpoint/2010/main" val="1024086991"/>
+      </p:ext>
+    </p:extLst>
+  </p:cSld>
+  <p:clrMapOvr>
+    <a:masterClrMapping/>
+  </p:clrMapOvr>
+</p:notes>
+</file>
+
+<file path=ppt/notesSlides/notesSlide9.xml><?xml version="1.0" encoding="utf-8"?>
+<p:notes xmlns:a="http://schemas.openxmlformats.org/drawingml/2006/main" xmlns:r="http://schemas.openxmlformats.org/officeDocument/2006/relationships" xmlns:p="http://schemas.openxmlformats.org/presentationml/2006/main">
+  <p:cSld>
+    <p:spTree>
+      <p:nvGrpSpPr>
+        <p:cNvPr id="1" name=""/>
+        <p:cNvGrpSpPr/>
+        <p:nvPr/>
+      </p:nvGrpSpPr>
+      <p:grpSpPr>
+        <a:xfrm>
+          <a:off x="0" y="0"/>
+          <a:ext cx="0" cy="0"/>
+          <a:chOff x="0" y="0"/>
+          <a:chExt cx="0" cy="0"/>
+        </a:xfrm>
+      </p:grpSpPr>
+      <p:sp>
+        <p:nvSpPr>
+          <p:cNvPr id="2" name="Slide Image Placeholder 1"/>
+          <p:cNvSpPr>
+            <a:spLocks noGrp="1" noRot="1" noChangeAspect="1"/>
+          </p:cNvSpPr>
+          <p:nvPr>
+            <p:ph type="sldImg"/>
+          </p:nvPr>
+        </p:nvSpPr>
+        <p:spPr/>
+      </p:sp>
+      <p:sp>
+        <p:nvSpPr>
+          <p:cNvPr id="3" name="Notes Placeholder 2"/>
+          <p:cNvSpPr>
+            <a:spLocks noGrp="1"/>
+          </p:cNvSpPr>
+          <p:nvPr>
+            <p:ph type="body" idx="1"/>
+          </p:nvPr>
+        </p:nvSpPr>
+        <p:spPr/>
+        <p:txBody>
+          <a:bodyPr/>
+          <a:lstStyle/>
+          <a:p>
+            <a:r>
+              <a:rPr lang="en-US" dirty="0"/>
+              <a:t/>
+            </a:r>
+            <a:endParaRPr lang="en-US" dirty="0"/>
+          </a:p>
+        </p:txBody>
+      </p:sp>
+      <p:sp>
+        <p:nvSpPr>
+          <p:cNvPr id="4" name="Slide Number Placeholder 3"/>
+          <p:cNvSpPr>
+            <a:spLocks noGrp="1"/>
+          </p:cNvSpPr>
+          <p:nvPr>
+            <p:ph type="sldNum" sz="quarter" idx="10"/>
+          </p:nvPr>
+        </p:nvSpPr>
+        <p:spPr/>
+        <p:txBody>
+          <a:bodyPr/>
+          <a:lstStyle/>
+          <a:p>
+            <a:fld id="{F7021451-1387-4CA6-816F-3879F97B5CBC}" type="slidenum">
+              <a:rPr lang="en-US"/>
+              <a:t>9</a:t>
             </a:fld>
             <a:endParaRPr lang="en-US"/>
           </a:p>
@@ -2491,7 +2580,7 @@
                 <a:ea typeface="Calibri" pitchFamily="34" charset="-122"/>
                 <a:cs typeface="Calibri" pitchFamily="34" charset="-120"/>
               </a:rPr>
-              <a:t>2 / 8</a:t>
+              <a:t>2 / 9</a:t>
             </a:r>
             <a:endParaRPr lang="en-US" sz="1000" dirty="0"/>
           </a:p>
@@ -3396,7 +3485,7 @@
                 <a:ea typeface="Calibri" pitchFamily="34" charset="-122"/>
                 <a:cs typeface="Calibri" pitchFamily="34" charset="-120"/>
               </a:rPr>
-              <a:t>3 / 8</a:t>
+              <a:t>3 / 9</a:t>
             </a:r>
             <a:endParaRPr lang="en-US" sz="1000" dirty="0"/>
           </a:p>
@@ -3460,7 +3549,7 @@
                 <a:ea typeface="Calibri" pitchFamily="34" charset="-122"/>
                 <a:cs typeface="Calibri" pitchFamily="34" charset="-120"/>
               </a:rPr>
-              <a:t>THE SIX CHECKS</a:t>
+              <a:t>THE SEVEN CHECKS</a:t>
             </a:r>
             <a:endParaRPr lang="en-US" sz="1300" dirty="0"/>
           </a:p>
@@ -3502,7 +3591,7 @@
                 <a:ea typeface="Cambria" pitchFamily="34" charset="-122"/>
                 <a:cs typeface="Cambria" pitchFamily="34" charset="-120"/>
               </a:rPr>
-              <a:t>Six checks. Each looks for a different kind of fake.</a:t>
+              <a:t>Seven checks. Each looks for a different kind of fake.</a:t>
             </a:r>
             <a:endParaRPr lang="en-US" sz="2600" dirty="0"/>
           </a:p>
@@ -3517,11 +3606,11 @@
         <p:spPr>
           <a:xfrm>
             <a:off x="548640" y="1874520"/>
-            <a:ext cx="1591056" cy="2606040"/>
+            <a:ext cx="1362456" cy="2606040"/>
           </a:xfrm>
           <a:prstGeom prst="roundRect">
             <a:avLst>
-              <a:gd name="adj" fmla="val 5172"/>
+              <a:gd name="adj" fmla="val 6040"/>
             </a:avLst>
           </a:prstGeom>
           <a:solidFill>
@@ -3543,7 +3632,7 @@
         </p:nvSpPr>
         <p:spPr>
           <a:xfrm>
-            <a:off x="1097280" y="2075688"/>
+            <a:off x="982980" y="2075688"/>
             <a:ext cx="493776" cy="493776"/>
           </a:xfrm>
           <a:prstGeom prst="ellipse">
@@ -3571,7 +3660,7 @@
         </p:blipFill>
         <p:spPr>
           <a:xfrm>
-            <a:off x="1210848" y="2189256"/>
+            <a:off x="1096548" y="2189256"/>
             <a:ext cx="266639" cy="266639"/>
           </a:xfrm>
           <a:prstGeom prst="rect">
@@ -3588,7 +3677,7 @@
         <p:spPr>
           <a:xfrm>
             <a:off x="658368" y="2697480"/>
-            <a:ext cx="1371600" cy="256032"/>
+            <a:ext cx="1143000" cy="256032"/>
           </a:xfrm>
           <a:prstGeom prst="rect">
             <a:avLst/>
@@ -3627,7 +3716,7 @@
         <p:spPr>
           <a:xfrm>
             <a:off x="658368" y="2935224"/>
-            <a:ext cx="1371600" cy="502920"/>
+            <a:ext cx="1143000" cy="502920"/>
           </a:xfrm>
           <a:prstGeom prst="rect">
             <a:avLst/>
@@ -3666,7 +3755,7 @@
         <p:spPr>
           <a:xfrm>
             <a:off x="676656" y="3447288"/>
-            <a:ext cx="1335024" cy="868680"/>
+            <a:ext cx="1106424" cy="868680"/>
           </a:xfrm>
           <a:prstGeom prst="rect">
             <a:avLst/>
@@ -3693,7 +3782,7 @@
                 <a:ea typeface="Calibri" pitchFamily="34" charset="-122"/>
                 <a:cs typeface="Calibri" pitchFamily="34" charset="-120"/>
               </a:rPr>
-              <a:t>Looks for AI-edited or pasted parts of the photo.</a:t>
+              <a:t>Looks for AI-edited or pasted parts. Shown as evidence — it no longer votes.</a:t>
             </a:r>
             <a:endParaRPr lang="en-US" sz="900" dirty="0"/>
           </a:p>
@@ -3707,12 +3796,12 @@
         </p:nvSpPr>
         <p:spPr>
           <a:xfrm>
-            <a:off x="2244852" y="1874520"/>
-            <a:ext cx="1591056" cy="2606040"/>
+            <a:off x="2016252" y="1874520"/>
+            <a:ext cx="1362456" cy="2606040"/>
           </a:xfrm>
           <a:prstGeom prst="roundRect">
             <a:avLst>
-              <a:gd name="adj" fmla="val 5172"/>
+              <a:gd name="adj" fmla="val 6040"/>
             </a:avLst>
           </a:prstGeom>
           <a:solidFill>
@@ -3734,7 +3823,7 @@
         </p:nvSpPr>
         <p:spPr>
           <a:xfrm>
-            <a:off x="2793492" y="2075688"/>
+            <a:off x="2450592" y="2075688"/>
             <a:ext cx="493776" cy="493776"/>
           </a:xfrm>
           <a:prstGeom prst="ellipse">
@@ -3762,7 +3851,7 @@
         </p:blipFill>
         <p:spPr>
           <a:xfrm>
-            <a:off x="2907060" y="2189256"/>
+            <a:off x="2564160" y="2189256"/>
             <a:ext cx="266639" cy="266639"/>
           </a:xfrm>
           <a:prstGeom prst="rect">
@@ -3778,8 +3867,8 @@
         </p:nvSpPr>
         <p:spPr>
           <a:xfrm>
-            <a:off x="2354580" y="2697480"/>
-            <a:ext cx="1371600" cy="256032"/>
+            <a:off x="2125980" y="2697480"/>
+            <a:ext cx="1143000" cy="256032"/>
           </a:xfrm>
           <a:prstGeom prst="rect">
             <a:avLst/>
@@ -3817,8 +3906,8 @@
         </p:nvSpPr>
         <p:spPr>
           <a:xfrm>
-            <a:off x="2354580" y="2935224"/>
-            <a:ext cx="1371600" cy="502920"/>
+            <a:off x="2125980" y="2935224"/>
+            <a:ext cx="1143000" cy="502920"/>
           </a:xfrm>
           <a:prstGeom prst="rect">
             <a:avLst/>
@@ -3856,8 +3945,8 @@
         </p:nvSpPr>
         <p:spPr>
           <a:xfrm>
-            <a:off x="2372868" y="3447288"/>
-            <a:ext cx="1335024" cy="868680"/>
+            <a:off x="2144268" y="3447288"/>
+            <a:ext cx="1106424" cy="868680"/>
           </a:xfrm>
           <a:prstGeom prst="rect">
             <a:avLst/>
@@ -3898,12 +3987,12 @@
         </p:nvSpPr>
         <p:spPr>
           <a:xfrm>
-            <a:off x="3941064" y="1874520"/>
-            <a:ext cx="1591056" cy="2606040"/>
+            <a:off x="3483864" y="1874520"/>
+            <a:ext cx="1362456" cy="2606040"/>
           </a:xfrm>
           <a:prstGeom prst="roundRect">
             <a:avLst>
-              <a:gd name="adj" fmla="val 5172"/>
+              <a:gd name="adj" fmla="val 6040"/>
             </a:avLst>
           </a:prstGeom>
           <a:solidFill>
@@ -3925,7 +4014,7 @@
         </p:nvSpPr>
         <p:spPr>
           <a:xfrm>
-            <a:off x="4489704" y="2075688"/>
+            <a:off x="3918204" y="2075688"/>
             <a:ext cx="493776" cy="493776"/>
           </a:xfrm>
           <a:prstGeom prst="ellipse">
@@ -3953,7 +4042,7 @@
         </p:blipFill>
         <p:spPr>
           <a:xfrm>
-            <a:off x="4603272" y="2189256"/>
+            <a:off x="4031772" y="2189256"/>
             <a:ext cx="266639" cy="266639"/>
           </a:xfrm>
           <a:prstGeom prst="rect">
@@ -3969,8 +4058,8 @@
         </p:nvSpPr>
         <p:spPr>
           <a:xfrm>
-            <a:off x="4050792" y="2697480"/>
-            <a:ext cx="1371600" cy="256032"/>
+            <a:off x="3593592" y="2697480"/>
+            <a:ext cx="1143000" cy="256032"/>
           </a:xfrm>
           <a:prstGeom prst="rect">
             <a:avLst/>
@@ -4008,8 +4097,8 @@
         </p:nvSpPr>
         <p:spPr>
           <a:xfrm>
-            <a:off x="4050792" y="2935224"/>
-            <a:ext cx="1371600" cy="502920"/>
+            <a:off x="3593592" y="2935224"/>
+            <a:ext cx="1143000" cy="502920"/>
           </a:xfrm>
           <a:prstGeom prst="rect">
             <a:avLst/>
@@ -4047,8 +4136,8 @@
         </p:nvSpPr>
         <p:spPr>
           <a:xfrm>
-            <a:off x="4069080" y="3447288"/>
-            <a:ext cx="1335024" cy="868680"/>
+            <a:off x="3611880" y="3447288"/>
+            <a:ext cx="1106424" cy="868680"/>
           </a:xfrm>
           <a:prstGeom prst="rect">
             <a:avLst/>
@@ -4089,12 +4178,12 @@
         </p:nvSpPr>
         <p:spPr>
           <a:xfrm>
-            <a:off x="5637276" y="1874520"/>
-            <a:ext cx="1591056" cy="2606040"/>
+            <a:off x="4951476" y="1874520"/>
+            <a:ext cx="1362456" cy="2606040"/>
           </a:xfrm>
           <a:prstGeom prst="roundRect">
             <a:avLst>
-              <a:gd name="adj" fmla="val 5172"/>
+              <a:gd name="adj" fmla="val 6040"/>
             </a:avLst>
           </a:prstGeom>
           <a:solidFill>
@@ -4116,7 +4205,7 @@
         </p:nvSpPr>
         <p:spPr>
           <a:xfrm>
-            <a:off x="6185916" y="2075688"/>
+            <a:off x="5385816" y="2075688"/>
             <a:ext cx="493776" cy="493776"/>
           </a:xfrm>
           <a:prstGeom prst="ellipse">
@@ -4144,7 +4233,7 @@
         </p:blipFill>
         <p:spPr>
           <a:xfrm>
-            <a:off x="6299484" y="2189256"/>
+            <a:off x="5499384" y="2189256"/>
             <a:ext cx="266639" cy="266639"/>
           </a:xfrm>
           <a:prstGeom prst="rect">
@@ -4160,8 +4249,8 @@
         </p:nvSpPr>
         <p:spPr>
           <a:xfrm>
-            <a:off x="5747004" y="2697480"/>
-            <a:ext cx="1371600" cy="256032"/>
+            <a:off x="5061204" y="2697480"/>
+            <a:ext cx="1143000" cy="256032"/>
           </a:xfrm>
           <a:prstGeom prst="rect">
             <a:avLst/>
@@ -4199,8 +4288,8 @@
         </p:nvSpPr>
         <p:spPr>
           <a:xfrm>
-            <a:off x="5747004" y="2935224"/>
-            <a:ext cx="1371600" cy="502920"/>
+            <a:off x="5061204" y="2935224"/>
+            <a:ext cx="1143000" cy="502920"/>
           </a:xfrm>
           <a:prstGeom prst="rect">
             <a:avLst/>
@@ -4238,8 +4327,8 @@
         </p:nvSpPr>
         <p:spPr>
           <a:xfrm>
-            <a:off x="5765292" y="3447288"/>
-            <a:ext cx="1335024" cy="868680"/>
+            <a:off x="5079492" y="3447288"/>
+            <a:ext cx="1106424" cy="868680"/>
           </a:xfrm>
           <a:prstGeom prst="rect">
             <a:avLst/>
@@ -4280,12 +4369,12 @@
         </p:nvSpPr>
         <p:spPr>
           <a:xfrm>
-            <a:off x="7333488" y="1874520"/>
-            <a:ext cx="1591056" cy="2606040"/>
+            <a:off x="6419088" y="1874520"/>
+            <a:ext cx="1362456" cy="2606040"/>
           </a:xfrm>
           <a:prstGeom prst="roundRect">
             <a:avLst>
-              <a:gd name="adj" fmla="val 5172"/>
+              <a:gd name="adj" fmla="val 6040"/>
             </a:avLst>
           </a:prstGeom>
           <a:solidFill>
@@ -4307,7 +4396,7 @@
         </p:nvSpPr>
         <p:spPr>
           <a:xfrm>
-            <a:off x="7882128" y="2075688"/>
+            <a:off x="6853428" y="2075688"/>
             <a:ext cx="493776" cy="493776"/>
           </a:xfrm>
           <a:prstGeom prst="ellipse">
@@ -4335,7 +4424,7 @@
         </p:blipFill>
         <p:spPr>
           <a:xfrm>
-            <a:off x="7995696" y="2189256"/>
+            <a:off x="6966996" y="2189256"/>
             <a:ext cx="266639" cy="266639"/>
           </a:xfrm>
           <a:prstGeom prst="rect">
@@ -4351,8 +4440,8 @@
         </p:nvSpPr>
         <p:spPr>
           <a:xfrm>
-            <a:off x="7443216" y="2697480"/>
-            <a:ext cx="1371600" cy="256032"/>
+            <a:off x="6528816" y="2697480"/>
+            <a:ext cx="1143000" cy="256032"/>
           </a:xfrm>
           <a:prstGeom prst="rect">
             <a:avLst/>
@@ -4390,8 +4479,8 @@
         </p:nvSpPr>
         <p:spPr>
           <a:xfrm>
-            <a:off x="7443216" y="2935224"/>
-            <a:ext cx="1371600" cy="502920"/>
+            <a:off x="6528816" y="2935224"/>
+            <a:ext cx="1143000" cy="502920"/>
           </a:xfrm>
           <a:prstGeom prst="rect">
             <a:avLst/>
@@ -4429,8 +4518,8 @@
         </p:nvSpPr>
         <p:spPr>
           <a:xfrm>
-            <a:off x="7461504" y="3447288"/>
-            <a:ext cx="1335024" cy="868680"/>
+            <a:off x="6547104" y="3447288"/>
+            <a:ext cx="1106424" cy="868680"/>
           </a:xfrm>
           <a:prstGeom prst="rect">
             <a:avLst/>
@@ -4471,12 +4560,12 @@
         </p:nvSpPr>
         <p:spPr>
           <a:xfrm>
-            <a:off x="9029700" y="1874520"/>
-            <a:ext cx="1591056" cy="2606040"/>
+            <a:off x="7886700" y="1874520"/>
+            <a:ext cx="1362456" cy="2606040"/>
           </a:xfrm>
           <a:prstGeom prst="roundRect">
             <a:avLst>
-              <a:gd name="adj" fmla="val 5172"/>
+              <a:gd name="adj" fmla="val 6040"/>
             </a:avLst>
           </a:prstGeom>
           <a:solidFill>
@@ -4498,7 +4587,7 @@
         </p:nvSpPr>
         <p:spPr>
           <a:xfrm>
-            <a:off x="9578340" y="2075688"/>
+            <a:off x="8321040" y="2075688"/>
             <a:ext cx="493776" cy="493776"/>
           </a:xfrm>
           <a:prstGeom prst="ellipse">
@@ -4526,7 +4615,7 @@
         </p:blipFill>
         <p:spPr>
           <a:xfrm>
-            <a:off x="9691908" y="2189256"/>
+            <a:off x="8434608" y="2189256"/>
             <a:ext cx="266639" cy="266639"/>
           </a:xfrm>
           <a:prstGeom prst="rect">
@@ -4542,8 +4631,8 @@
         </p:nvSpPr>
         <p:spPr>
           <a:xfrm>
-            <a:off x="9139428" y="2697480"/>
-            <a:ext cx="1371600" cy="256032"/>
+            <a:off x="7996428" y="2697480"/>
+            <a:ext cx="1143000" cy="256032"/>
           </a:xfrm>
           <a:prstGeom prst="rect">
             <a:avLst/>
@@ -4581,8 +4670,8 @@
         </p:nvSpPr>
         <p:spPr>
           <a:xfrm>
-            <a:off x="9139428" y="2935224"/>
-            <a:ext cx="1371600" cy="502920"/>
+            <a:off x="7996428" y="2935224"/>
+            <a:ext cx="1143000" cy="502920"/>
           </a:xfrm>
           <a:prstGeom prst="rect">
             <a:avLst/>
@@ -4606,7 +4695,7 @@
                 <a:ea typeface="Calibri" pitchFamily="34" charset="-122"/>
                 <a:cs typeface="Calibri" pitchFamily="34" charset="-120"/>
               </a:rPr>
-              <a:t>Replay Detection</a:t>
+              <a:t>Moire Detection</a:t>
             </a:r>
             <a:endParaRPr lang="en-US" sz="1250" dirty="0"/>
           </a:p>
@@ -4620,8 +4709,8 @@
         </p:nvSpPr>
         <p:spPr>
           <a:xfrm>
-            <a:off x="9157716" y="3447288"/>
-            <a:ext cx="1335024" cy="868680"/>
+            <a:off x="8014716" y="3447288"/>
+            <a:ext cx="1106424" cy="868680"/>
           </a:xfrm>
           <a:prstGeom prst="rect">
             <a:avLst/>
@@ -4648,7 +4737,7 @@
                 <a:ea typeface="Calibri" pitchFamily="34" charset="-122"/>
                 <a:cs typeface="Calibri" pitchFamily="34" charset="-120"/>
               </a:rPr>
-              <a:t>Catches someone holding up a screen or printout instead of a real face.</a:t>
+              <a:t>Looks for the interference pattern a photographed screen leaves behind.</a:t>
             </a:r>
             <a:endParaRPr lang="en-US" sz="900" dirty="0"/>
           </a:p>
@@ -4656,7 +4745,198 @@
       </p:sp>
       <p:sp>
         <p:nvSpPr>
-          <p:cNvPr id="40" name="Text 32"/>
+          <p:cNvPr id="40" name="Shape 32"/>
+          <p:cNvSpPr/>
+          <p:nvPr/>
+        </p:nvSpPr>
+        <p:spPr>
+          <a:xfrm>
+            <a:off x="9354312" y="1874520"/>
+            <a:ext cx="1362456" cy="2606040"/>
+          </a:xfrm>
+          <a:prstGeom prst="roundRect">
+            <a:avLst>
+              <a:gd name="adj" fmla="val 6040"/>
+            </a:avLst>
+          </a:prstGeom>
+          <a:solidFill>
+            <a:srgbClr val="1B1B1B"/>
+          </a:solidFill>
+          <a:ln w="9525">
+            <a:solidFill>
+              <a:srgbClr val="2E2E2E"/>
+            </a:solidFill>
+            <a:prstDash val="solid"/>
+          </a:ln>
+        </p:spPr>
+      </p:sp>
+      <p:sp>
+        <p:nvSpPr>
+          <p:cNvPr id="41" name="Shape 33"/>
+          <p:cNvSpPr/>
+          <p:nvPr/>
+        </p:nvSpPr>
+        <p:spPr>
+          <a:xfrm>
+            <a:off x="9788652" y="2075688"/>
+            <a:ext cx="493776" cy="493776"/>
+          </a:xfrm>
+          <a:prstGeom prst="ellipse">
+            <a:avLst/>
+          </a:prstGeom>
+          <a:solidFill>
+            <a:srgbClr val="FFC627"/>
+          </a:solidFill>
+          <a:ln/>
+        </p:spPr>
+      </p:sp>
+      <p:pic>
+        <p:nvPicPr>
+          <p:cNvPr id="42" name="Image 6" descr="/Users/mahadev/Downloads/ProofSnap-main/pitch/icons_yb/eyeslash_blk.png">    </p:cNvPr>
+          <p:cNvPicPr>
+            <a:picLocks noChangeAspect="1"/>
+          </p:cNvPicPr>
+          <p:nvPr/>
+        </p:nvPicPr>
+        <p:blipFill>
+          <a:blip r:embed="rId7"/>
+          <a:stretch>
+            <a:fillRect/>
+          </a:stretch>
+        </p:blipFill>
+        <p:spPr>
+          <a:xfrm>
+            <a:off x="9902220" y="2189256"/>
+            <a:ext cx="266639" cy="266639"/>
+          </a:xfrm>
+          <a:prstGeom prst="rect">
+            <a:avLst/>
+          </a:prstGeom>
+        </p:spPr>
+      </p:pic>
+      <p:sp>
+        <p:nvSpPr>
+          <p:cNvPr id="43" name="Text 34"/>
+          <p:cNvSpPr txBox="1"/>
+          <p:nvPr/>
+        </p:nvSpPr>
+        <p:spPr>
+          <a:xfrm>
+            <a:off x="9464040" y="2697480"/>
+            <a:ext cx="1143000" cy="256032"/>
+          </a:xfrm>
+          <a:prstGeom prst="rect">
+            <a:avLst/>
+          </a:prstGeom>
+          <a:noFill/>
+          <a:ln/>
+        </p:spPr>
+        <p:txBody>
+          <a:bodyPr wrap="square" lIns="0" tIns="0" rIns="0" bIns="0" rtlCol="0" anchor="ctr"/>
+          <a:lstStyle/>
+          <a:p>
+            <a:pPr algn="ctr" indent="0" marL="0">
+              <a:buNone/>
+            </a:pPr>
+            <a:r>
+              <a:rPr lang="en-US" sz="1000" b="1" spc="100" kern="0" dirty="0">
+                <a:solidFill>
+                  <a:srgbClr val="FFC627"/>
+                </a:solidFill>
+                <a:latin typeface="Calibri" pitchFamily="34" charset="0"/>
+                <a:ea typeface="Calibri" pitchFamily="34" charset="-122"/>
+                <a:cs typeface="Calibri" pitchFamily="34" charset="-120"/>
+              </a:rPr>
+              <a:t>LANE H</a:t>
+            </a:r>
+            <a:endParaRPr lang="en-US" sz="1000" dirty="0"/>
+          </a:p>
+        </p:txBody>
+      </p:sp>
+      <p:sp>
+        <p:nvSpPr>
+          <p:cNvPr id="44" name="Text 35"/>
+          <p:cNvSpPr txBox="1"/>
+          <p:nvPr/>
+        </p:nvSpPr>
+        <p:spPr>
+          <a:xfrm>
+            <a:off x="9464040" y="2935224"/>
+            <a:ext cx="1143000" cy="502920"/>
+          </a:xfrm>
+          <a:prstGeom prst="rect">
+            <a:avLst/>
+          </a:prstGeom>
+          <a:noFill/>
+          <a:ln/>
+        </p:spPr>
+        <p:txBody>
+          <a:bodyPr wrap="square" lIns="0" tIns="0" rIns="0" bIns="0" rtlCol="0" anchor="ctr"/>
+          <a:lstStyle/>
+          <a:p>
+            <a:pPr algn="ctr" indent="0" marL="0">
+              <a:buNone/>
+            </a:pPr>
+            <a:r>
+              <a:rPr lang="en-US" sz="1250" b="1" dirty="0">
+                <a:solidFill>
+                  <a:srgbClr val="FFFFFF"/>
+                </a:solidFill>
+                <a:latin typeface="Calibri" pitchFamily="34" charset="0"/>
+                <a:ea typeface="Calibri" pitchFamily="34" charset="-122"/>
+                <a:cs typeface="Calibri" pitchFamily="34" charset="-120"/>
+              </a:rPr>
+              <a:t>Visual Replay Check</a:t>
+            </a:r>
+            <a:endParaRPr lang="en-US" sz="1250" dirty="0"/>
+          </a:p>
+        </p:txBody>
+      </p:sp>
+      <p:sp>
+        <p:nvSpPr>
+          <p:cNvPr id="45" name="Text 36"/>
+          <p:cNvSpPr txBox="1"/>
+          <p:nvPr/>
+        </p:nvSpPr>
+        <p:spPr>
+          <a:xfrm>
+            <a:off x="9482328" y="3447288"/>
+            <a:ext cx="1106424" cy="868680"/>
+          </a:xfrm>
+          <a:prstGeom prst="rect">
+            <a:avLst/>
+          </a:prstGeom>
+          <a:noFill/>
+          <a:ln/>
+        </p:spPr>
+        <p:txBody>
+          <a:bodyPr wrap="square" lIns="0" tIns="0" rIns="0" bIns="0" rtlCol="0" anchor="ctr"/>
+          <a:lstStyle/>
+          <a:p>
+            <a:pPr algn="ctr" indent="0" marL="0">
+              <a:lnSpc>
+                <a:spcPct val="115000"/>
+              </a:lnSpc>
+              <a:buNone/>
+            </a:pPr>
+            <a:r>
+              <a:rPr lang="en-US" sz="900" dirty="0">
+                <a:solidFill>
+                  <a:srgbClr val="9A9A9A"/>
+                </a:solidFill>
+                <a:latin typeface="Calibri" pitchFamily="34" charset="0"/>
+                <a:ea typeface="Calibri" pitchFamily="34" charset="-122"/>
+                <a:cs typeface="Calibri" pitchFamily="34" charset="-120"/>
+              </a:rPr>
+              <a:t>Spots a screen bezel, browser tabs, glare or a cursor in the frame. Our strongest check.</a:t>
+            </a:r>
+            <a:endParaRPr lang="en-US" sz="900" dirty="0"/>
+          </a:p>
+        </p:txBody>
+      </p:sp>
+      <p:sp>
+        <p:nvSpPr>
+          <p:cNvPr id="46" name="Text 37"/>
           <p:cNvSpPr txBox="1"/>
           <p:nvPr/>
         </p:nvSpPr>
@@ -4695,7 +4975,7 @@
       </p:sp>
       <p:sp>
         <p:nvSpPr>
-          <p:cNvPr id="41" name="Shape 33"/>
+          <p:cNvPr id="47" name="Shape 38"/>
           <p:cNvSpPr/>
           <p:nvPr/>
         </p:nvSpPr>
@@ -4717,7 +4997,7 @@
       </p:sp>
       <p:sp>
         <p:nvSpPr>
-          <p:cNvPr id="42" name="Shape 34"/>
+          <p:cNvPr id="48" name="Shape 39"/>
           <p:cNvSpPr/>
           <p:nvPr/>
         </p:nvSpPr>
@@ -4742,14 +5022,14 @@
       </p:sp>
       <p:pic>
         <p:nvPicPr>
-          <p:cNvPr id="43" name="Image 6" descr="/Users/mahadev/Downloads/ProofSnap-main/pitch/icons_yb/scale_wht.png">    </p:cNvPr>
+          <p:cNvPr id="49" name="Image 7" descr="/Users/mahadev/Downloads/ProofSnap-main/pitch/icons_yb/scale_wht.png">    </p:cNvPr>
           <p:cNvPicPr>
             <a:picLocks noChangeAspect="1"/>
           </p:cNvPicPr>
           <p:nvPr/>
         </p:nvPicPr>
         <p:blipFill>
-          <a:blip r:embed="rId7"/>
+          <a:blip r:embed="rId8"/>
           <a:stretch>
             <a:fillRect/>
           </a:stretch>
@@ -4766,7 +5046,7 @@
       </p:pic>
       <p:sp>
         <p:nvSpPr>
-          <p:cNvPr id="44" name="Text 35"/>
+          <p:cNvPr id="50" name="Text 40"/>
           <p:cNvSpPr txBox="1"/>
           <p:nvPr/>
         </p:nvSpPr>
@@ -4805,7 +5085,7 @@
       </p:sp>
       <p:sp>
         <p:nvSpPr>
-          <p:cNvPr id="45" name="Text 36"/>
+          <p:cNvPr id="51" name="Text 41"/>
           <p:cNvSpPr txBox="1"/>
           <p:nvPr/>
         </p:nvSpPr>
@@ -4836,7 +5116,7 @@
                 <a:ea typeface="Calibri" pitchFamily="34" charset="-122"/>
                 <a:cs typeface="Calibri" pitchFamily="34" charset="-120"/>
               </a:rPr>
-              <a:t>Weighs all six checks together — and says exactly which ones agreed or disagreed, and why.</a:t>
+              <a:t>Weighs the voting checks together — and says exactly which ones agreed or disagreed, and why.</a:t>
             </a:r>
             <a:endParaRPr lang="en-US" sz="1100" dirty="0"/>
           </a:p>
@@ -4844,7 +5124,7 @@
       </p:sp>
       <p:sp>
         <p:nvSpPr>
-          <p:cNvPr id="46" name="Text 37"/>
+          <p:cNvPr id="52" name="Text 42"/>
           <p:cNvSpPr txBox="1"/>
           <p:nvPr/>
         </p:nvSpPr>
@@ -4875,7 +5155,7 @@
                 <a:ea typeface="Calibri" pitchFamily="34" charset="-122"/>
                 <a:cs typeface="Calibri" pitchFamily="34" charset="-120"/>
               </a:rPr>
-              <a:t>4 / 8</a:t>
+              <a:t>4 / 9</a:t>
             </a:r>
             <a:endParaRPr lang="en-US" sz="1000" dirty="0"/>
           </a:p>
@@ -6283,7 +6563,7 @@
                 <a:ea typeface="Calibri" pitchFamily="34" charset="-122"/>
                 <a:cs typeface="Calibri" pitchFamily="34" charset="-120"/>
               </a:rPr>
-              <a:t>5 / 8</a:t>
+              <a:t>5 / 9</a:t>
             </a:r>
             <a:endParaRPr lang="en-US" sz="1000" dirty="0"/>
           </a:p>
@@ -6996,12 +7276,12 @@
           <a:p>
             <a:pPr indent="0" marL="0">
               <a:lnSpc>
-                <a:spcPct val="120000"/>
+                <a:spcPct val="115000"/>
               </a:lnSpc>
               <a:buNone/>
             </a:pPr>
             <a:r>
-              <a:rPr lang="en-US" sz="1150" i="1" dirty="0">
+              <a:rPr lang="en-US" sz="1050" i="1" dirty="0">
                 <a:solidFill>
                   <a:srgbClr val="FFC627"/>
                 </a:solidFill>
@@ -7009,9 +7289,9 @@
                 <a:ea typeface="Calibri" pitchFamily="34" charset="-122"/>
                 <a:cs typeface="Calibri" pitchFamily="34" charset="-120"/>
               </a:rPr>
-              <a:t>Still learning: being retrained on more real-world photos to reduce mistakes — its confidence is deliberately capped until that's done.</a:t>
-            </a:r>
-            <a:endParaRPr lang="en-US" sz="1150" dirty="0"/>
+              <a:t>What we found: on real captures this model scored 0.87 on a genuine ID card and 0.00 on four screen replays — backwards. It now shows as evidence only and casts no vote. We report that rather than hide it.</a:t>
+            </a:r>
+            <a:endParaRPr lang="en-US" sz="1050" dirty="0"/>
           </a:p>
         </p:txBody>
       </p:sp>
@@ -7048,7 +7328,7 @@
                 <a:ea typeface="Calibri" pitchFamily="34" charset="-122"/>
                 <a:cs typeface="Calibri" pitchFamily="34" charset="-120"/>
               </a:rPr>
-              <a:t>6 / 8</a:t>
+              <a:t>6 / 9</a:t>
             </a:r>
             <a:endParaRPr lang="en-US" sz="1000" dirty="0"/>
           </a:p>
@@ -7112,7 +7392,7 @@
                 <a:ea typeface="Calibri" pitchFamily="34" charset="-122"/>
                 <a:cs typeface="Calibri" pitchFamily="34" charset="-120"/>
               </a:rPr>
-              <a:t>THE RESEARCH BEHIND IT</a:t>
+              <a:t>MEASURED, NOT CLAIMED</a:t>
             </a:r>
             <a:endParaRPr lang="en-US" sz="1300" dirty="0"/>
           </a:p>
@@ -7127,7 +7407,7 @@
         <p:spPr>
           <a:xfrm>
             <a:off x="548640" y="786384"/>
-            <a:ext cx="10515600" cy="1280160"/>
+            <a:ext cx="11155680" cy="1280160"/>
           </a:xfrm>
           <a:prstGeom prst="rect">
             <a:avLst/>
@@ -7146,7 +7426,7 @@
               <a:buNone/>
             </a:pPr>
             <a:r>
-              <a:rPr lang="en-US" sz="3000" b="1" dirty="0">
+              <a:rPr lang="en-US" sz="2500" b="1" dirty="0">
                 <a:solidFill>
                   <a:srgbClr val="FFFFFF"/>
                 </a:solidFill>
@@ -7154,107 +7434,146 @@
                 <a:ea typeface="Cambria" pitchFamily="34" charset="-122"/>
                 <a:cs typeface="Cambria" pitchFamily="34" charset="-120"/>
               </a:rPr>
-              <a:t>Why we test this way</a:t>
-            </a:r>
-            <a:endParaRPr lang="en-US" sz="3000" dirty="0"/>
-          </a:p>
-        </p:txBody>
-      </p:sp>
-      <p:sp>
-        <p:nvSpPr>
-          <p:cNvPr id="4" name="Shape 2"/>
+              <a:t>We tested it against our own real captures — and it was failing</a:t>
+            </a:r>
+            <a:endParaRPr lang="en-US" sz="2500" dirty="0"/>
+          </a:p>
+        </p:txBody>
+      </p:sp>
+      <p:sp>
+        <p:nvSpPr>
+          <p:cNvPr id="4" name="Text 2"/>
+          <p:cNvSpPr txBox="1"/>
+          <p:nvPr/>
+        </p:nvSpPr>
+        <p:spPr>
+          <a:xfrm>
+            <a:off x="548640" y="1572768"/>
+            <a:ext cx="10177272" cy="365760"/>
+          </a:xfrm>
+          <a:prstGeom prst="rect">
+            <a:avLst/>
+          </a:prstGeom>
+          <a:noFill/>
+          <a:ln/>
+        </p:spPr>
+        <p:txBody>
+          <a:bodyPr wrap="square" lIns="0" tIns="0" rIns="0" bIns="0" rtlCol="0" anchor="ctr"/>
+          <a:lstStyle/>
+          <a:p>
+            <a:pPr indent="0" marL="0">
+              <a:buNone/>
+            </a:pPr>
+            <a:r>
+              <a:rPr lang="en-US" sz="1250" dirty="0">
+                <a:solidFill>
+                  <a:srgbClr val="9A9A9A"/>
+                </a:solidFill>
+                <a:latin typeface="Calibri" pitchFamily="34" charset="0"/>
+                <a:ea typeface="Calibri" pitchFamily="34" charset="-122"/>
+                <a:cs typeface="Calibri" pitchFamily="34" charset="-120"/>
+              </a:rPr>
+              <a:t>Six real KYC attempts pulled from our own storage. Four of the six ID photos turned out to be photos of a laptop screen.</a:t>
+            </a:r>
+            <a:endParaRPr lang="en-US" sz="1250" dirty="0"/>
+          </a:p>
+        </p:txBody>
+      </p:sp>
+      <p:sp>
+        <p:nvSpPr>
+          <p:cNvPr id="5" name="Shape 3"/>
           <p:cNvSpPr/>
           <p:nvPr/>
         </p:nvSpPr>
         <p:spPr>
           <a:xfrm>
-            <a:off x="548640" y="1920240"/>
-            <a:ext cx="10177272" cy="3566160"/>
+            <a:off x="548640" y="2029968"/>
+            <a:ext cx="2377440" cy="1207008"/>
           </a:xfrm>
           <a:prstGeom prst="roundRect">
             <a:avLst>
-              <a:gd name="adj" fmla="val 2564"/>
+              <a:gd name="adj" fmla="val 6818"/>
             </a:avLst>
           </a:prstGeom>
           <a:solidFill>
             <a:srgbClr val="1B1B1B"/>
           </a:solidFill>
-          <a:ln w="15875">
+          <a:ln w="9525">
             <a:solidFill>
-              <a:srgbClr val="C99A0E"/>
+              <a:srgbClr val="2E2E2E"/>
             </a:solidFill>
-            <a:prstDash val="dash"/>
+            <a:prstDash val="solid"/>
           </a:ln>
         </p:spPr>
       </p:sp>
       <p:sp>
         <p:nvSpPr>
-          <p:cNvPr id="5" name="Text 3"/>
-          <p:cNvSpPr txBox="1"/>
-          <p:nvPr/>
-        </p:nvSpPr>
-        <p:spPr>
-          <a:xfrm>
-            <a:off x="548640" y="3474720"/>
-            <a:ext cx="10177272" cy="457200"/>
-          </a:xfrm>
-          <a:prstGeom prst="rect">
-            <a:avLst/>
-          </a:prstGeom>
-          <a:noFill/>
-          <a:ln/>
-        </p:spPr>
-        <p:txBody>
-          <a:bodyPr wrap="square" lIns="0" tIns="0" rIns="0" bIns="0" rtlCol="0" anchor="ctr"/>
-          <a:lstStyle/>
-          <a:p>
-            <a:pPr algn="ctr" indent="0" marL="0">
-              <a:buNone/>
-            </a:pPr>
-            <a:r>
-              <a:rPr lang="en-US" sz="1300" i="1" dirty="0">
-                <a:solidFill>
-                  <a:srgbClr val="6B6B6B"/>
-                </a:solidFill>
-                <a:latin typeface="Calibri" pitchFamily="34" charset="0"/>
-                <a:ea typeface="Calibri" pitchFamily="34" charset="-122"/>
-                <a:cs typeface="Calibri" pitchFamily="34" charset="-120"/>
-              </a:rPr>
-              <a:t>[ paste paper figure / screenshot here ]</a:t>
-            </a:r>
-            <a:endParaRPr lang="en-US" sz="1300" dirty="0"/>
-          </a:p>
-        </p:txBody>
-      </p:sp>
-      <p:sp>
-        <p:nvSpPr>
           <p:cNvPr id="6" name="Text 4"/>
           <p:cNvSpPr txBox="1"/>
           <p:nvPr/>
         </p:nvSpPr>
         <p:spPr>
           <a:xfrm>
-            <a:off x="548640" y="5623560"/>
-            <a:ext cx="10177272" cy="777240"/>
-          </a:xfrm>
-          <a:prstGeom prst="rect">
-            <a:avLst/>
-          </a:prstGeom>
-          <a:noFill/>
-          <a:ln/>
-        </p:spPr>
-        <p:txBody>
-          <a:bodyPr wrap="square" lIns="0" tIns="0" rIns="0" bIns="0" rtlCol="0" anchor="ctr"/>
+            <a:off x="804672" y="2176272"/>
+            <a:ext cx="1865376" cy="663854"/>
+          </a:xfrm>
+          <a:prstGeom prst="rect">
+            <a:avLst/>
+          </a:prstGeom>
+          <a:noFill/>
+          <a:ln/>
+        </p:spPr>
+        <p:txBody>
+          <a:bodyPr wrap="square" lIns="0" tIns="0" rIns="0" bIns="0" rtlCol="0" anchor="ctr"/>
+          <a:lstStyle/>
+          <a:p>
+            <a:pPr indent="0" marL="0">
+              <a:buNone/>
+            </a:pPr>
+            <a:r>
+              <a:rPr lang="en-US" sz="4000" b="1" dirty="0">
+                <a:solidFill>
+                  <a:srgbClr val="3FBE6B"/>
+                </a:solidFill>
+                <a:latin typeface="Cambria" pitchFamily="34" charset="0"/>
+                <a:ea typeface="Cambria" pitchFamily="34" charset="-122"/>
+                <a:cs typeface="Cambria" pitchFamily="34" charset="-120"/>
+              </a:rPr>
+              <a:t>2 → 0</a:t>
+            </a:r>
+            <a:endParaRPr lang="en-US" sz="4000" dirty="0"/>
+          </a:p>
+        </p:txBody>
+      </p:sp>
+      <p:sp>
+        <p:nvSpPr>
+          <p:cNvPr id="7" name="Text 5"/>
+          <p:cNvSpPr txBox="1"/>
+          <p:nvPr/>
+        </p:nvSpPr>
+        <p:spPr>
+          <a:xfrm>
+            <a:off x="804672" y="2730033"/>
+            <a:ext cx="1865376" cy="458663"/>
+          </a:xfrm>
+          <a:prstGeom prst="rect">
+            <a:avLst/>
+          </a:prstGeom>
+          <a:noFill/>
+          <a:ln/>
+        </p:spPr>
+        <p:txBody>
+          <a:bodyPr wrap="square" lIns="0" tIns="0" rIns="0" bIns="0" rtlCol="0" anchor="t"/>
           <a:lstStyle/>
           <a:p>
             <a:pPr indent="0" marL="0">
               <a:lnSpc>
-                <a:spcPct val="130000"/>
+                <a:spcPct val="115000"/>
               </a:lnSpc>
               <a:buNone/>
             </a:pPr>
             <a:r>
-              <a:rPr lang="en-US" sz="1300" dirty="0">
+              <a:rPr lang="en-US" sz="1250" dirty="0">
                 <a:solidFill>
                   <a:srgbClr val="9A9A9A"/>
                 </a:solidFill>
@@ -7262,15 +7581,1354 @@
                 <a:ea typeface="Calibri" pitchFamily="34" charset="-122"/>
                 <a:cs typeface="Calibri" pitchFamily="34" charset="-120"/>
               </a:rPr>
-              <a:t>arXiv 2602.00192 — most AI-photo detectors get fooled once an edit is pasted into a real photo, not the AI content itself. That's the exact trick we built and test our checks against.</a:t>
-            </a:r>
-            <a:endParaRPr lang="en-US" sz="1300" dirty="0"/>
-          </a:p>
-        </p:txBody>
-      </p:sp>
-      <p:sp>
-        <p:nvSpPr>
-          <p:cNvPr id="7" name="Text 5"/>
+              <a:t>Fakes wrongly ACCEPTED</a:t>
+            </a:r>
+            <a:endParaRPr lang="en-US" sz="1250" dirty="0"/>
+          </a:p>
+        </p:txBody>
+      </p:sp>
+      <p:sp>
+        <p:nvSpPr>
+          <p:cNvPr id="8" name="Shape 6"/>
+          <p:cNvSpPr/>
+          <p:nvPr/>
+        </p:nvSpPr>
+        <p:spPr>
+          <a:xfrm>
+            <a:off x="3063240" y="2029968"/>
+            <a:ext cx="2377440" cy="1207008"/>
+          </a:xfrm>
+          <a:prstGeom prst="roundRect">
+            <a:avLst>
+              <a:gd name="adj" fmla="val 6818"/>
+            </a:avLst>
+          </a:prstGeom>
+          <a:solidFill>
+            <a:srgbClr val="1B1B1B"/>
+          </a:solidFill>
+          <a:ln w="9525">
+            <a:solidFill>
+              <a:srgbClr val="2E2E2E"/>
+            </a:solidFill>
+            <a:prstDash val="solid"/>
+          </a:ln>
+        </p:spPr>
+      </p:sp>
+      <p:sp>
+        <p:nvSpPr>
+          <p:cNvPr id="9" name="Text 7"/>
+          <p:cNvSpPr txBox="1"/>
+          <p:nvPr/>
+        </p:nvSpPr>
+        <p:spPr>
+          <a:xfrm>
+            <a:off x="3319272" y="2176272"/>
+            <a:ext cx="1865376" cy="663854"/>
+          </a:xfrm>
+          <a:prstGeom prst="rect">
+            <a:avLst/>
+          </a:prstGeom>
+          <a:noFill/>
+          <a:ln/>
+        </p:spPr>
+        <p:txBody>
+          <a:bodyPr wrap="square" lIns="0" tIns="0" rIns="0" bIns="0" rtlCol="0" anchor="ctr"/>
+          <a:lstStyle/>
+          <a:p>
+            <a:pPr indent="0" marL="0">
+              <a:buNone/>
+            </a:pPr>
+            <a:r>
+              <a:rPr lang="en-US" sz="4000" b="1" dirty="0">
+                <a:solidFill>
+                  <a:srgbClr val="E8483A"/>
+                </a:solidFill>
+                <a:latin typeface="Cambria" pitchFamily="34" charset="0"/>
+                <a:ea typeface="Cambria" pitchFamily="34" charset="-122"/>
+                <a:cs typeface="Cambria" pitchFamily="34" charset="-120"/>
+              </a:rPr>
+              <a:t>1 / 4</a:t>
+            </a:r>
+            <a:endParaRPr lang="en-US" sz="4000" dirty="0"/>
+          </a:p>
+        </p:txBody>
+      </p:sp>
+      <p:sp>
+        <p:nvSpPr>
+          <p:cNvPr id="10" name="Text 8"/>
+          <p:cNvSpPr txBox="1"/>
+          <p:nvPr/>
+        </p:nvSpPr>
+        <p:spPr>
+          <a:xfrm>
+            <a:off x="3319272" y="2730033"/>
+            <a:ext cx="1865376" cy="458663"/>
+          </a:xfrm>
+          <a:prstGeom prst="rect">
+            <a:avLst/>
+          </a:prstGeom>
+          <a:noFill/>
+          <a:ln/>
+        </p:spPr>
+        <p:txBody>
+          <a:bodyPr wrap="square" lIns="0" tIns="0" rIns="0" bIns="0" rtlCol="0" anchor="t"/>
+          <a:lstStyle/>
+          <a:p>
+            <a:pPr indent="0" marL="0">
+              <a:lnSpc>
+                <a:spcPct val="115000"/>
+              </a:lnSpc>
+              <a:buNone/>
+            </a:pPr>
+            <a:r>
+              <a:rPr lang="en-US" sz="1250" dirty="0">
+                <a:solidFill>
+                  <a:srgbClr val="9A9A9A"/>
+                </a:solidFill>
+                <a:latin typeface="Calibri" pitchFamily="34" charset="0"/>
+                <a:ea typeface="Calibri" pitchFamily="34" charset="-122"/>
+                <a:cs typeface="Calibri" pitchFamily="34" charset="-120"/>
+              </a:rPr>
+              <a:t>Screen replays caught, before</a:t>
+            </a:r>
+            <a:endParaRPr lang="en-US" sz="1250" dirty="0"/>
+          </a:p>
+        </p:txBody>
+      </p:sp>
+      <p:sp>
+        <p:nvSpPr>
+          <p:cNvPr id="11" name="Shape 9"/>
+          <p:cNvSpPr/>
+          <p:nvPr/>
+        </p:nvSpPr>
+        <p:spPr>
+          <a:xfrm>
+            <a:off x="5577840" y="2029968"/>
+            <a:ext cx="2377440" cy="1207008"/>
+          </a:xfrm>
+          <a:prstGeom prst="roundRect">
+            <a:avLst>
+              <a:gd name="adj" fmla="val 6818"/>
+            </a:avLst>
+          </a:prstGeom>
+          <a:solidFill>
+            <a:srgbClr val="1B1B1B"/>
+          </a:solidFill>
+          <a:ln w="9525">
+            <a:solidFill>
+              <a:srgbClr val="2E2E2E"/>
+            </a:solidFill>
+            <a:prstDash val="solid"/>
+          </a:ln>
+        </p:spPr>
+      </p:sp>
+      <p:sp>
+        <p:nvSpPr>
+          <p:cNvPr id="12" name="Text 10"/>
+          <p:cNvSpPr txBox="1"/>
+          <p:nvPr/>
+        </p:nvSpPr>
+        <p:spPr>
+          <a:xfrm>
+            <a:off x="5833872" y="2176272"/>
+            <a:ext cx="1865376" cy="663854"/>
+          </a:xfrm>
+          <a:prstGeom prst="rect">
+            <a:avLst/>
+          </a:prstGeom>
+          <a:noFill/>
+          <a:ln/>
+        </p:spPr>
+        <p:txBody>
+          <a:bodyPr wrap="square" lIns="0" tIns="0" rIns="0" bIns="0" rtlCol="0" anchor="ctr"/>
+          <a:lstStyle/>
+          <a:p>
+            <a:pPr indent="0" marL="0">
+              <a:buNone/>
+            </a:pPr>
+            <a:r>
+              <a:rPr lang="en-US" sz="4000" b="1" dirty="0">
+                <a:solidFill>
+                  <a:srgbClr val="3FBE6B"/>
+                </a:solidFill>
+                <a:latin typeface="Cambria" pitchFamily="34" charset="0"/>
+                <a:ea typeface="Cambria" pitchFamily="34" charset="-122"/>
+                <a:cs typeface="Cambria" pitchFamily="34" charset="-120"/>
+              </a:rPr>
+              <a:t>4 / 4</a:t>
+            </a:r>
+            <a:endParaRPr lang="en-US" sz="4000" dirty="0"/>
+          </a:p>
+        </p:txBody>
+      </p:sp>
+      <p:sp>
+        <p:nvSpPr>
+          <p:cNvPr id="13" name="Text 11"/>
+          <p:cNvSpPr txBox="1"/>
+          <p:nvPr/>
+        </p:nvSpPr>
+        <p:spPr>
+          <a:xfrm>
+            <a:off x="5833872" y="2730033"/>
+            <a:ext cx="1865376" cy="458663"/>
+          </a:xfrm>
+          <a:prstGeom prst="rect">
+            <a:avLst/>
+          </a:prstGeom>
+          <a:noFill/>
+          <a:ln/>
+        </p:spPr>
+        <p:txBody>
+          <a:bodyPr wrap="square" lIns="0" tIns="0" rIns="0" bIns="0" rtlCol="0" anchor="t"/>
+          <a:lstStyle/>
+          <a:p>
+            <a:pPr indent="0" marL="0">
+              <a:lnSpc>
+                <a:spcPct val="115000"/>
+              </a:lnSpc>
+              <a:buNone/>
+            </a:pPr>
+            <a:r>
+              <a:rPr lang="en-US" sz="1250" dirty="0">
+                <a:solidFill>
+                  <a:srgbClr val="9A9A9A"/>
+                </a:solidFill>
+                <a:latin typeface="Calibri" pitchFamily="34" charset="0"/>
+                <a:ea typeface="Calibri" pitchFamily="34" charset="-122"/>
+                <a:cs typeface="Calibri" pitchFamily="34" charset="-120"/>
+              </a:rPr>
+              <a:t>Screen replays caught, after</a:t>
+            </a:r>
+            <a:endParaRPr lang="en-US" sz="1250" dirty="0"/>
+          </a:p>
+        </p:txBody>
+      </p:sp>
+      <p:sp>
+        <p:nvSpPr>
+          <p:cNvPr id="14" name="Shape 12"/>
+          <p:cNvSpPr/>
+          <p:nvPr/>
+        </p:nvSpPr>
+        <p:spPr>
+          <a:xfrm>
+            <a:off x="8092440" y="2029968"/>
+            <a:ext cx="2633472" cy="1207008"/>
+          </a:xfrm>
+          <a:prstGeom prst="roundRect">
+            <a:avLst>
+              <a:gd name="adj" fmla="val 6818"/>
+            </a:avLst>
+          </a:prstGeom>
+          <a:solidFill>
+            <a:srgbClr val="1B1B1B"/>
+          </a:solidFill>
+          <a:ln w="9525">
+            <a:solidFill>
+              <a:srgbClr val="2E2E2E"/>
+            </a:solidFill>
+            <a:prstDash val="solid"/>
+          </a:ln>
+        </p:spPr>
+      </p:sp>
+      <p:sp>
+        <p:nvSpPr>
+          <p:cNvPr id="15" name="Text 13"/>
+          <p:cNvSpPr txBox="1"/>
+          <p:nvPr/>
+        </p:nvSpPr>
+        <p:spPr>
+          <a:xfrm>
+            <a:off x="8348472" y="2176272"/>
+            <a:ext cx="2121408" cy="663854"/>
+          </a:xfrm>
+          <a:prstGeom prst="rect">
+            <a:avLst/>
+          </a:prstGeom>
+          <a:noFill/>
+          <a:ln/>
+        </p:spPr>
+        <p:txBody>
+          <a:bodyPr wrap="square" lIns="0" tIns="0" rIns="0" bIns="0" rtlCol="0" anchor="ctr"/>
+          <a:lstStyle/>
+          <a:p>
+            <a:pPr indent="0" marL="0">
+              <a:buNone/>
+            </a:pPr>
+            <a:r>
+              <a:rPr lang="en-US" sz="4000" b="1" dirty="0">
+                <a:solidFill>
+                  <a:srgbClr val="3FBE6B"/>
+                </a:solidFill>
+                <a:latin typeface="Cambria" pitchFamily="34" charset="0"/>
+                <a:ea typeface="Cambria" pitchFamily="34" charset="-122"/>
+                <a:cs typeface="Cambria" pitchFamily="34" charset="-120"/>
+              </a:rPr>
+              <a:t>0</a:t>
+            </a:r>
+            <a:endParaRPr lang="en-US" sz="4000" dirty="0"/>
+          </a:p>
+        </p:txBody>
+      </p:sp>
+      <p:sp>
+        <p:nvSpPr>
+          <p:cNvPr id="16" name="Text 14"/>
+          <p:cNvSpPr txBox="1"/>
+          <p:nvPr/>
+        </p:nvSpPr>
+        <p:spPr>
+          <a:xfrm>
+            <a:off x="8348472" y="2730033"/>
+            <a:ext cx="2121408" cy="458663"/>
+          </a:xfrm>
+          <a:prstGeom prst="rect">
+            <a:avLst/>
+          </a:prstGeom>
+          <a:noFill/>
+          <a:ln/>
+        </p:spPr>
+        <p:txBody>
+          <a:bodyPr wrap="square" lIns="0" tIns="0" rIns="0" bIns="0" rtlCol="0" anchor="t"/>
+          <a:lstStyle/>
+          <a:p>
+            <a:pPr indent="0" marL="0">
+              <a:lnSpc>
+                <a:spcPct val="115000"/>
+              </a:lnSpc>
+              <a:buNone/>
+            </a:pPr>
+            <a:r>
+              <a:rPr lang="en-US" sz="1250" dirty="0">
+                <a:solidFill>
+                  <a:srgbClr val="9A9A9A"/>
+                </a:solidFill>
+                <a:latin typeface="Calibri" pitchFamily="34" charset="0"/>
+                <a:ea typeface="Calibri" pitchFamily="34" charset="-122"/>
+                <a:cs typeface="Calibri" pitchFamily="34" charset="-120"/>
+              </a:rPr>
+              <a:t>Real users wrongly rejected</a:t>
+            </a:r>
+            <a:endParaRPr lang="en-US" sz="1250" dirty="0"/>
+          </a:p>
+        </p:txBody>
+      </p:sp>
+      <p:sp>
+        <p:nvSpPr>
+          <p:cNvPr id="17" name="Shape 15"/>
+          <p:cNvSpPr/>
+          <p:nvPr/>
+        </p:nvSpPr>
+        <p:spPr>
+          <a:xfrm>
+            <a:off x="548640" y="3456432"/>
+            <a:ext cx="10177272" cy="384048"/>
+          </a:xfrm>
+          <a:prstGeom prst="roundRect">
+            <a:avLst>
+              <a:gd name="adj" fmla="val 14286"/>
+            </a:avLst>
+          </a:prstGeom>
+          <a:solidFill>
+            <a:srgbClr val="242424"/>
+          </a:solidFill>
+          <a:ln/>
+        </p:spPr>
+      </p:sp>
+      <p:sp>
+        <p:nvSpPr>
+          <p:cNvPr id="18" name="Text 16"/>
+          <p:cNvSpPr txBox="1"/>
+          <p:nvPr/>
+        </p:nvSpPr>
+        <p:spPr>
+          <a:xfrm>
+            <a:off x="777240" y="3511296"/>
+            <a:ext cx="5120640" cy="274320"/>
+          </a:xfrm>
+          <a:prstGeom prst="rect">
+            <a:avLst/>
+          </a:prstGeom>
+          <a:noFill/>
+          <a:ln/>
+        </p:spPr>
+        <p:txBody>
+          <a:bodyPr wrap="square" lIns="0" tIns="0" rIns="0" bIns="0" rtlCol="0" anchor="ctr"/>
+          <a:lstStyle/>
+          <a:p>
+            <a:pPr indent="0" marL="0">
+              <a:buNone/>
+            </a:pPr>
+            <a:r>
+              <a:rPr lang="en-US" sz="1050" b="1" spc="100" kern="0" dirty="0">
+                <a:solidFill>
+                  <a:srgbClr val="FFC627"/>
+                </a:solidFill>
+                <a:latin typeface="Calibri" pitchFamily="34" charset="0"/>
+                <a:ea typeface="Calibri" pitchFamily="34" charset="-122"/>
+                <a:cs typeface="Calibri" pitchFamily="34" charset="-120"/>
+              </a:rPr>
+              <a:t>What was submitted</a:t>
+            </a:r>
+            <a:endParaRPr lang="en-US" sz="1050" dirty="0"/>
+          </a:p>
+        </p:txBody>
+      </p:sp>
+      <p:sp>
+        <p:nvSpPr>
+          <p:cNvPr id="19" name="Text 17"/>
+          <p:cNvSpPr txBox="1"/>
+          <p:nvPr/>
+        </p:nvSpPr>
+        <p:spPr>
+          <a:xfrm>
+            <a:off x="5989320" y="3511296"/>
+            <a:ext cx="2103120" cy="274320"/>
+          </a:xfrm>
+          <a:prstGeom prst="rect">
+            <a:avLst/>
+          </a:prstGeom>
+          <a:noFill/>
+          <a:ln/>
+        </p:spPr>
+        <p:txBody>
+          <a:bodyPr wrap="square" lIns="0" tIns="0" rIns="0" bIns="0" rtlCol="0" anchor="ctr"/>
+          <a:lstStyle/>
+          <a:p>
+            <a:pPr indent="0" marL="0">
+              <a:buNone/>
+            </a:pPr>
+            <a:r>
+              <a:rPr lang="en-US" sz="1050" b="1" spc="100" kern="0" dirty="0">
+                <a:solidFill>
+                  <a:srgbClr val="FFC627"/>
+                </a:solidFill>
+                <a:latin typeface="Calibri" pitchFamily="34" charset="0"/>
+                <a:ea typeface="Calibri" pitchFamily="34" charset="-122"/>
+                <a:cs typeface="Calibri" pitchFamily="34" charset="-120"/>
+              </a:rPr>
+              <a:t>Before</a:t>
+            </a:r>
+            <a:endParaRPr lang="en-US" sz="1050" dirty="0"/>
+          </a:p>
+        </p:txBody>
+      </p:sp>
+      <p:sp>
+        <p:nvSpPr>
+          <p:cNvPr id="20" name="Text 18"/>
+          <p:cNvSpPr txBox="1"/>
+          <p:nvPr/>
+        </p:nvSpPr>
+        <p:spPr>
+          <a:xfrm>
+            <a:off x="8183880" y="3511296"/>
+            <a:ext cx="2377440" cy="274320"/>
+          </a:xfrm>
+          <a:prstGeom prst="rect">
+            <a:avLst/>
+          </a:prstGeom>
+          <a:noFill/>
+          <a:ln/>
+        </p:spPr>
+        <p:txBody>
+          <a:bodyPr wrap="square" lIns="0" tIns="0" rIns="0" bIns="0" rtlCol="0" anchor="ctr"/>
+          <a:lstStyle/>
+          <a:p>
+            <a:pPr indent="0" marL="0">
+              <a:buNone/>
+            </a:pPr>
+            <a:r>
+              <a:rPr lang="en-US" sz="1050" b="1" spc="100" kern="0" dirty="0">
+                <a:solidFill>
+                  <a:srgbClr val="FFC627"/>
+                </a:solidFill>
+                <a:latin typeface="Calibri" pitchFamily="34" charset="0"/>
+                <a:ea typeface="Calibri" pitchFamily="34" charset="-122"/>
+                <a:cs typeface="Calibri" pitchFamily="34" charset="-120"/>
+              </a:rPr>
+              <a:t>After</a:t>
+            </a:r>
+            <a:endParaRPr lang="en-US" sz="1050" dirty="0"/>
+          </a:p>
+        </p:txBody>
+      </p:sp>
+      <p:sp>
+        <p:nvSpPr>
+          <p:cNvPr id="21" name="Shape 19"/>
+          <p:cNvSpPr/>
+          <p:nvPr/>
+        </p:nvSpPr>
+        <p:spPr>
+          <a:xfrm>
+            <a:off x="548640" y="3877056"/>
+            <a:ext cx="10177272" cy="338328"/>
+          </a:xfrm>
+          <a:prstGeom prst="roundRect">
+            <a:avLst>
+              <a:gd name="adj" fmla="val 16216"/>
+            </a:avLst>
+          </a:prstGeom>
+          <a:solidFill>
+            <a:srgbClr val="1B1B1B"/>
+          </a:solidFill>
+          <a:ln/>
+        </p:spPr>
+      </p:sp>
+      <p:sp>
+        <p:nvSpPr>
+          <p:cNvPr id="22" name="Text 20"/>
+          <p:cNvSpPr txBox="1"/>
+          <p:nvPr/>
+        </p:nvSpPr>
+        <p:spPr>
+          <a:xfrm>
+            <a:off x="777240" y="3959352"/>
+            <a:ext cx="5120640" cy="292608"/>
+          </a:xfrm>
+          <a:prstGeom prst="rect">
+            <a:avLst/>
+          </a:prstGeom>
+          <a:noFill/>
+          <a:ln/>
+        </p:spPr>
+        <p:txBody>
+          <a:bodyPr wrap="square" lIns="0" tIns="0" rIns="0" bIns="0" rtlCol="0" anchor="ctr"/>
+          <a:lstStyle/>
+          <a:p>
+            <a:pPr indent="0" marL="0">
+              <a:buNone/>
+            </a:pPr>
+            <a:r>
+              <a:rPr lang="en-US" sz="1100" dirty="0">
+                <a:solidFill>
+                  <a:srgbClr val="FFFFFF"/>
+                </a:solidFill>
+                <a:latin typeface="Calibri" pitchFamily="34" charset="0"/>
+                <a:ea typeface="Calibri" pitchFamily="34" charset="-122"/>
+                <a:cs typeface="Calibri" pitchFamily="34" charset="-120"/>
+              </a:rPr>
+              <a:t>Genuine card + genuine selfie</a:t>
+            </a:r>
+            <a:endParaRPr lang="en-US" sz="1100" dirty="0"/>
+          </a:p>
+        </p:txBody>
+      </p:sp>
+      <p:sp>
+        <p:nvSpPr>
+          <p:cNvPr id="23" name="Text 21"/>
+          <p:cNvSpPr txBox="1"/>
+          <p:nvPr/>
+        </p:nvSpPr>
+        <p:spPr>
+          <a:xfrm>
+            <a:off x="5989320" y="3959352"/>
+            <a:ext cx="2103120" cy="292608"/>
+          </a:xfrm>
+          <a:prstGeom prst="rect">
+            <a:avLst/>
+          </a:prstGeom>
+          <a:noFill/>
+          <a:ln/>
+        </p:spPr>
+        <p:txBody>
+          <a:bodyPr wrap="square" lIns="0" tIns="0" rIns="0" bIns="0" rtlCol="0" anchor="ctr"/>
+          <a:lstStyle/>
+          <a:p>
+            <a:pPr indent="0" marL="0">
+              <a:buNone/>
+            </a:pPr>
+            <a:r>
+              <a:rPr lang="en-US" sz="1100" b="1" dirty="0">
+                <a:solidFill>
+                  <a:srgbClr val="9A9A9A"/>
+                </a:solidFill>
+                <a:latin typeface="Calibri" pitchFamily="34" charset="0"/>
+                <a:ea typeface="Calibri" pitchFamily="34" charset="-122"/>
+                <a:cs typeface="Calibri" pitchFamily="34" charset="-120"/>
+              </a:rPr>
+              <a:t>REVIEW</a:t>
+            </a:r>
+            <a:endParaRPr lang="en-US" sz="1100" dirty="0"/>
+          </a:p>
+        </p:txBody>
+      </p:sp>
+      <p:sp>
+        <p:nvSpPr>
+          <p:cNvPr id="24" name="Text 22"/>
+          <p:cNvSpPr txBox="1"/>
+          <p:nvPr/>
+        </p:nvSpPr>
+        <p:spPr>
+          <a:xfrm>
+            <a:off x="8183880" y="3959352"/>
+            <a:ext cx="2377440" cy="292608"/>
+          </a:xfrm>
+          <a:prstGeom prst="rect">
+            <a:avLst/>
+          </a:prstGeom>
+          <a:noFill/>
+          <a:ln/>
+        </p:spPr>
+        <p:txBody>
+          <a:bodyPr wrap="square" lIns="0" tIns="0" rIns="0" bIns="0" rtlCol="0" anchor="ctr"/>
+          <a:lstStyle/>
+          <a:p>
+            <a:pPr indent="0" marL="0">
+              <a:buNone/>
+            </a:pPr>
+            <a:r>
+              <a:rPr lang="en-US" sz="1100" b="1" dirty="0">
+                <a:solidFill>
+                  <a:srgbClr val="3FBE6B"/>
+                </a:solidFill>
+                <a:latin typeface="Calibri" pitchFamily="34" charset="0"/>
+                <a:ea typeface="Calibri" pitchFamily="34" charset="-122"/>
+                <a:cs typeface="Calibri" pitchFamily="34" charset="-120"/>
+              </a:rPr>
+              <a:t>ACCEPT</a:t>
+            </a:r>
+            <a:endParaRPr lang="en-US" sz="1100" dirty="0"/>
+          </a:p>
+        </p:txBody>
+      </p:sp>
+      <p:sp>
+        <p:nvSpPr>
+          <p:cNvPr id="25" name="Shape 23"/>
+          <p:cNvSpPr/>
+          <p:nvPr/>
+        </p:nvSpPr>
+        <p:spPr>
+          <a:xfrm>
+            <a:off x="548640" y="4270248"/>
+            <a:ext cx="10177272" cy="338328"/>
+          </a:xfrm>
+          <a:prstGeom prst="roundRect">
+            <a:avLst>
+              <a:gd name="adj" fmla="val 16216"/>
+            </a:avLst>
+          </a:prstGeom>
+          <a:solidFill>
+            <a:srgbClr val="242424"/>
+          </a:solidFill>
+          <a:ln/>
+        </p:spPr>
+      </p:sp>
+      <p:sp>
+        <p:nvSpPr>
+          <p:cNvPr id="26" name="Text 24"/>
+          <p:cNvSpPr txBox="1"/>
+          <p:nvPr/>
+        </p:nvSpPr>
+        <p:spPr>
+          <a:xfrm>
+            <a:off x="777240" y="4352544"/>
+            <a:ext cx="5120640" cy="292608"/>
+          </a:xfrm>
+          <a:prstGeom prst="rect">
+            <a:avLst/>
+          </a:prstGeom>
+          <a:noFill/>
+          <a:ln/>
+        </p:spPr>
+        <p:txBody>
+          <a:bodyPr wrap="square" lIns="0" tIns="0" rIns="0" bIns="0" rtlCol="0" anchor="ctr"/>
+          <a:lstStyle/>
+          <a:p>
+            <a:pPr indent="0" marL="0">
+              <a:buNone/>
+            </a:pPr>
+            <a:r>
+              <a:rPr lang="en-US" sz="1100" dirty="0">
+                <a:solidFill>
+                  <a:srgbClr val="FFFFFF"/>
+                </a:solidFill>
+                <a:latin typeface="Calibri" pitchFamily="34" charset="0"/>
+                <a:ea typeface="Calibri" pitchFamily="34" charset="-122"/>
+                <a:cs typeface="Calibri" pitchFamily="34" charset="-120"/>
+              </a:rPr>
+              <a:t>ID photographed off a screen</a:t>
+            </a:r>
+            <a:endParaRPr lang="en-US" sz="1100" dirty="0"/>
+          </a:p>
+        </p:txBody>
+      </p:sp>
+      <p:sp>
+        <p:nvSpPr>
+          <p:cNvPr id="27" name="Text 25"/>
+          <p:cNvSpPr txBox="1"/>
+          <p:nvPr/>
+        </p:nvSpPr>
+        <p:spPr>
+          <a:xfrm>
+            <a:off x="5989320" y="4352544"/>
+            <a:ext cx="2103120" cy="292608"/>
+          </a:xfrm>
+          <a:prstGeom prst="rect">
+            <a:avLst/>
+          </a:prstGeom>
+          <a:noFill/>
+          <a:ln/>
+        </p:spPr>
+        <p:txBody>
+          <a:bodyPr wrap="square" lIns="0" tIns="0" rIns="0" bIns="0" rtlCol="0" anchor="ctr"/>
+          <a:lstStyle/>
+          <a:p>
+            <a:pPr indent="0" marL="0">
+              <a:buNone/>
+            </a:pPr>
+            <a:r>
+              <a:rPr lang="en-US" sz="1100" b="1" dirty="0">
+                <a:solidFill>
+                  <a:srgbClr val="E8483A"/>
+                </a:solidFill>
+                <a:latin typeface="Calibri" pitchFamily="34" charset="0"/>
+                <a:ea typeface="Calibri" pitchFamily="34" charset="-122"/>
+                <a:cs typeface="Calibri" pitchFamily="34" charset="-120"/>
+              </a:rPr>
+              <a:t>ACCEPT</a:t>
+            </a:r>
+            <a:endParaRPr lang="en-US" sz="1100" dirty="0"/>
+          </a:p>
+        </p:txBody>
+      </p:sp>
+      <p:sp>
+        <p:nvSpPr>
+          <p:cNvPr id="28" name="Text 26"/>
+          <p:cNvSpPr txBox="1"/>
+          <p:nvPr/>
+        </p:nvSpPr>
+        <p:spPr>
+          <a:xfrm>
+            <a:off x="8183880" y="4352544"/>
+            <a:ext cx="2377440" cy="292608"/>
+          </a:xfrm>
+          <a:prstGeom prst="rect">
+            <a:avLst/>
+          </a:prstGeom>
+          <a:noFill/>
+          <a:ln/>
+        </p:spPr>
+        <p:txBody>
+          <a:bodyPr wrap="square" lIns="0" tIns="0" rIns="0" bIns="0" rtlCol="0" anchor="ctr"/>
+          <a:lstStyle/>
+          <a:p>
+            <a:pPr indent="0" marL="0">
+              <a:buNone/>
+            </a:pPr>
+            <a:r>
+              <a:rPr lang="en-US" sz="1100" b="1" dirty="0">
+                <a:solidFill>
+                  <a:srgbClr val="3FBE6B"/>
+                </a:solidFill>
+                <a:latin typeface="Calibri" pitchFamily="34" charset="0"/>
+                <a:ea typeface="Calibri" pitchFamily="34" charset="-122"/>
+                <a:cs typeface="Calibri" pitchFamily="34" charset="-120"/>
+              </a:rPr>
+              <a:t>REJECT</a:t>
+            </a:r>
+            <a:endParaRPr lang="en-US" sz="1100" dirty="0"/>
+          </a:p>
+        </p:txBody>
+      </p:sp>
+      <p:sp>
+        <p:nvSpPr>
+          <p:cNvPr id="29" name="Shape 27"/>
+          <p:cNvSpPr/>
+          <p:nvPr/>
+        </p:nvSpPr>
+        <p:spPr>
+          <a:xfrm>
+            <a:off x="548640" y="4663440"/>
+            <a:ext cx="10177272" cy="338328"/>
+          </a:xfrm>
+          <a:prstGeom prst="roundRect">
+            <a:avLst>
+              <a:gd name="adj" fmla="val 16216"/>
+            </a:avLst>
+          </a:prstGeom>
+          <a:solidFill>
+            <a:srgbClr val="1B1B1B"/>
+          </a:solidFill>
+          <a:ln/>
+        </p:spPr>
+      </p:sp>
+      <p:sp>
+        <p:nvSpPr>
+          <p:cNvPr id="30" name="Text 28"/>
+          <p:cNvSpPr txBox="1"/>
+          <p:nvPr/>
+        </p:nvSpPr>
+        <p:spPr>
+          <a:xfrm>
+            <a:off x="777240" y="4745736"/>
+            <a:ext cx="5120640" cy="292608"/>
+          </a:xfrm>
+          <a:prstGeom prst="rect">
+            <a:avLst/>
+          </a:prstGeom>
+          <a:noFill/>
+          <a:ln/>
+        </p:spPr>
+        <p:txBody>
+          <a:bodyPr wrap="square" lIns="0" tIns="0" rIns="0" bIns="0" rtlCol="0" anchor="ctr"/>
+          <a:lstStyle/>
+          <a:p>
+            <a:pPr indent="0" marL="0">
+              <a:buNone/>
+            </a:pPr>
+            <a:r>
+              <a:rPr lang="en-US" sz="1100" dirty="0">
+                <a:solidFill>
+                  <a:srgbClr val="FFFFFF"/>
+                </a:solidFill>
+                <a:latin typeface="Calibri" pitchFamily="34" charset="0"/>
+                <a:ea typeface="Calibri" pitchFamily="34" charset="-122"/>
+                <a:cs typeface="Calibri" pitchFamily="34" charset="-120"/>
+              </a:rPr>
+              <a:t>ID photographed off a screen</a:t>
+            </a:r>
+            <a:endParaRPr lang="en-US" sz="1100" dirty="0"/>
+          </a:p>
+        </p:txBody>
+      </p:sp>
+      <p:sp>
+        <p:nvSpPr>
+          <p:cNvPr id="31" name="Text 29"/>
+          <p:cNvSpPr txBox="1"/>
+          <p:nvPr/>
+        </p:nvSpPr>
+        <p:spPr>
+          <a:xfrm>
+            <a:off x="5989320" y="4745736"/>
+            <a:ext cx="2103120" cy="292608"/>
+          </a:xfrm>
+          <a:prstGeom prst="rect">
+            <a:avLst/>
+          </a:prstGeom>
+          <a:noFill/>
+          <a:ln/>
+        </p:spPr>
+        <p:txBody>
+          <a:bodyPr wrap="square" lIns="0" tIns="0" rIns="0" bIns="0" rtlCol="0" anchor="ctr"/>
+          <a:lstStyle/>
+          <a:p>
+            <a:pPr indent="0" marL="0">
+              <a:buNone/>
+            </a:pPr>
+            <a:r>
+              <a:rPr lang="en-US" sz="1100" b="1" dirty="0">
+                <a:solidFill>
+                  <a:srgbClr val="E8483A"/>
+                </a:solidFill>
+                <a:latin typeface="Calibri" pitchFamily="34" charset="0"/>
+                <a:ea typeface="Calibri" pitchFamily="34" charset="-122"/>
+                <a:cs typeface="Calibri" pitchFamily="34" charset="-120"/>
+              </a:rPr>
+              <a:t>ACCEPT</a:t>
+            </a:r>
+            <a:endParaRPr lang="en-US" sz="1100" dirty="0"/>
+          </a:p>
+        </p:txBody>
+      </p:sp>
+      <p:sp>
+        <p:nvSpPr>
+          <p:cNvPr id="32" name="Text 30"/>
+          <p:cNvSpPr txBox="1"/>
+          <p:nvPr/>
+        </p:nvSpPr>
+        <p:spPr>
+          <a:xfrm>
+            <a:off x="8183880" y="4745736"/>
+            <a:ext cx="2377440" cy="292608"/>
+          </a:xfrm>
+          <a:prstGeom prst="rect">
+            <a:avLst/>
+          </a:prstGeom>
+          <a:noFill/>
+          <a:ln/>
+        </p:spPr>
+        <p:txBody>
+          <a:bodyPr wrap="square" lIns="0" tIns="0" rIns="0" bIns="0" rtlCol="0" anchor="ctr"/>
+          <a:lstStyle/>
+          <a:p>
+            <a:pPr indent="0" marL="0">
+              <a:buNone/>
+            </a:pPr>
+            <a:r>
+              <a:rPr lang="en-US" sz="1100" b="1" dirty="0">
+                <a:solidFill>
+                  <a:srgbClr val="3FBE6B"/>
+                </a:solidFill>
+                <a:latin typeface="Calibri" pitchFamily="34" charset="0"/>
+                <a:ea typeface="Calibri" pitchFamily="34" charset="-122"/>
+                <a:cs typeface="Calibri" pitchFamily="34" charset="-120"/>
+              </a:rPr>
+              <a:t>REJECT</a:t>
+            </a:r>
+            <a:endParaRPr lang="en-US" sz="1100" dirty="0"/>
+          </a:p>
+        </p:txBody>
+      </p:sp>
+      <p:sp>
+        <p:nvSpPr>
+          <p:cNvPr id="33" name="Shape 31"/>
+          <p:cNvSpPr/>
+          <p:nvPr/>
+        </p:nvSpPr>
+        <p:spPr>
+          <a:xfrm>
+            <a:off x="548640" y="5056632"/>
+            <a:ext cx="10177272" cy="338328"/>
+          </a:xfrm>
+          <a:prstGeom prst="roundRect">
+            <a:avLst>
+              <a:gd name="adj" fmla="val 16216"/>
+            </a:avLst>
+          </a:prstGeom>
+          <a:solidFill>
+            <a:srgbClr val="242424"/>
+          </a:solidFill>
+          <a:ln/>
+        </p:spPr>
+      </p:sp>
+      <p:sp>
+        <p:nvSpPr>
+          <p:cNvPr id="34" name="Text 32"/>
+          <p:cNvSpPr txBox="1"/>
+          <p:nvPr/>
+        </p:nvSpPr>
+        <p:spPr>
+          <a:xfrm>
+            <a:off x="777240" y="5138928"/>
+            <a:ext cx="5120640" cy="292608"/>
+          </a:xfrm>
+          <a:prstGeom prst="rect">
+            <a:avLst/>
+          </a:prstGeom>
+          <a:noFill/>
+          <a:ln/>
+        </p:spPr>
+        <p:txBody>
+          <a:bodyPr wrap="square" lIns="0" tIns="0" rIns="0" bIns="0" rtlCol="0" anchor="ctr"/>
+          <a:lstStyle/>
+          <a:p>
+            <a:pPr indent="0" marL="0">
+              <a:buNone/>
+            </a:pPr>
+            <a:r>
+              <a:rPr lang="en-US" sz="1100" dirty="0">
+                <a:solidFill>
+                  <a:srgbClr val="FFFFFF"/>
+                </a:solidFill>
+                <a:latin typeface="Calibri" pitchFamily="34" charset="0"/>
+                <a:ea typeface="Calibri" pitchFamily="34" charset="-122"/>
+                <a:cs typeface="Calibri" pitchFamily="34" charset="-120"/>
+              </a:rPr>
+              <a:t>Both photos off a screen</a:t>
+            </a:r>
+            <a:endParaRPr lang="en-US" sz="1100" dirty="0"/>
+          </a:p>
+        </p:txBody>
+      </p:sp>
+      <p:sp>
+        <p:nvSpPr>
+          <p:cNvPr id="35" name="Text 33"/>
+          <p:cNvSpPr txBox="1"/>
+          <p:nvPr/>
+        </p:nvSpPr>
+        <p:spPr>
+          <a:xfrm>
+            <a:off x="5989320" y="5138928"/>
+            <a:ext cx="2103120" cy="292608"/>
+          </a:xfrm>
+          <a:prstGeom prst="rect">
+            <a:avLst/>
+          </a:prstGeom>
+          <a:noFill/>
+          <a:ln/>
+        </p:spPr>
+        <p:txBody>
+          <a:bodyPr wrap="square" lIns="0" tIns="0" rIns="0" bIns="0" rtlCol="0" anchor="ctr"/>
+          <a:lstStyle/>
+          <a:p>
+            <a:pPr indent="0" marL="0">
+              <a:buNone/>
+            </a:pPr>
+            <a:r>
+              <a:rPr lang="en-US" sz="1100" b="1" dirty="0">
+                <a:solidFill>
+                  <a:srgbClr val="9A9A9A"/>
+                </a:solidFill>
+                <a:latin typeface="Calibri" pitchFamily="34" charset="0"/>
+                <a:ea typeface="Calibri" pitchFamily="34" charset="-122"/>
+                <a:cs typeface="Calibri" pitchFamily="34" charset="-120"/>
+              </a:rPr>
+              <a:t>REVIEW</a:t>
+            </a:r>
+            <a:endParaRPr lang="en-US" sz="1100" dirty="0"/>
+          </a:p>
+        </p:txBody>
+      </p:sp>
+      <p:sp>
+        <p:nvSpPr>
+          <p:cNvPr id="36" name="Text 34"/>
+          <p:cNvSpPr txBox="1"/>
+          <p:nvPr/>
+        </p:nvSpPr>
+        <p:spPr>
+          <a:xfrm>
+            <a:off x="8183880" y="5138928"/>
+            <a:ext cx="2377440" cy="292608"/>
+          </a:xfrm>
+          <a:prstGeom prst="rect">
+            <a:avLst/>
+          </a:prstGeom>
+          <a:noFill/>
+          <a:ln/>
+        </p:spPr>
+        <p:txBody>
+          <a:bodyPr wrap="square" lIns="0" tIns="0" rIns="0" bIns="0" rtlCol="0" anchor="ctr"/>
+          <a:lstStyle/>
+          <a:p>
+            <a:pPr indent="0" marL="0">
+              <a:buNone/>
+            </a:pPr>
+            <a:r>
+              <a:rPr lang="en-US" sz="1100" b="1" dirty="0">
+                <a:solidFill>
+                  <a:srgbClr val="3FBE6B"/>
+                </a:solidFill>
+                <a:latin typeface="Calibri" pitchFamily="34" charset="0"/>
+                <a:ea typeface="Calibri" pitchFamily="34" charset="-122"/>
+                <a:cs typeface="Calibri" pitchFamily="34" charset="-120"/>
+              </a:rPr>
+              <a:t>REJECT</a:t>
+            </a:r>
+            <a:endParaRPr lang="en-US" sz="1100" dirty="0"/>
+          </a:p>
+        </p:txBody>
+      </p:sp>
+      <p:sp>
+        <p:nvSpPr>
+          <p:cNvPr id="37" name="Shape 35"/>
+          <p:cNvSpPr/>
+          <p:nvPr/>
+        </p:nvSpPr>
+        <p:spPr>
+          <a:xfrm>
+            <a:off x="548640" y="5449824"/>
+            <a:ext cx="10177272" cy="338328"/>
+          </a:xfrm>
+          <a:prstGeom prst="roundRect">
+            <a:avLst>
+              <a:gd name="adj" fmla="val 16216"/>
+            </a:avLst>
+          </a:prstGeom>
+          <a:solidFill>
+            <a:srgbClr val="1B1B1B"/>
+          </a:solidFill>
+          <a:ln/>
+        </p:spPr>
+      </p:sp>
+      <p:sp>
+        <p:nvSpPr>
+          <p:cNvPr id="38" name="Text 36"/>
+          <p:cNvSpPr txBox="1"/>
+          <p:nvPr/>
+        </p:nvSpPr>
+        <p:spPr>
+          <a:xfrm>
+            <a:off x="777240" y="5532120"/>
+            <a:ext cx="5120640" cy="292608"/>
+          </a:xfrm>
+          <a:prstGeom prst="rect">
+            <a:avLst/>
+          </a:prstGeom>
+          <a:noFill/>
+          <a:ln/>
+        </p:spPr>
+        <p:txBody>
+          <a:bodyPr wrap="square" lIns="0" tIns="0" rIns="0" bIns="0" rtlCol="0" anchor="ctr"/>
+          <a:lstStyle/>
+          <a:p>
+            <a:pPr indent="0" marL="0">
+              <a:buNone/>
+            </a:pPr>
+            <a:r>
+              <a:rPr lang="en-US" sz="1100" dirty="0">
+                <a:solidFill>
+                  <a:srgbClr val="FFFFFF"/>
+                </a:solidFill>
+                <a:latin typeface="Calibri" pitchFamily="34" charset="0"/>
+                <a:ea typeface="Calibri" pitchFamily="34" charset="-122"/>
+                <a:cs typeface="Calibri" pitchFamily="34" charset="-120"/>
+              </a:rPr>
+              <a:t>Screen replay + wrong person</a:t>
+            </a:r>
+            <a:endParaRPr lang="en-US" sz="1100" dirty="0"/>
+          </a:p>
+        </p:txBody>
+      </p:sp>
+      <p:sp>
+        <p:nvSpPr>
+          <p:cNvPr id="39" name="Text 37"/>
+          <p:cNvSpPr txBox="1"/>
+          <p:nvPr/>
+        </p:nvSpPr>
+        <p:spPr>
+          <a:xfrm>
+            <a:off x="5989320" y="5532120"/>
+            <a:ext cx="2103120" cy="292608"/>
+          </a:xfrm>
+          <a:prstGeom prst="rect">
+            <a:avLst/>
+          </a:prstGeom>
+          <a:noFill/>
+          <a:ln/>
+        </p:spPr>
+        <p:txBody>
+          <a:bodyPr wrap="square" lIns="0" tIns="0" rIns="0" bIns="0" rtlCol="0" anchor="ctr"/>
+          <a:lstStyle/>
+          <a:p>
+            <a:pPr indent="0" marL="0">
+              <a:buNone/>
+            </a:pPr>
+            <a:r>
+              <a:rPr lang="en-US" sz="1100" b="1" dirty="0">
+                <a:solidFill>
+                  <a:srgbClr val="9A9A9A"/>
+                </a:solidFill>
+                <a:latin typeface="Calibri" pitchFamily="34" charset="0"/>
+                <a:ea typeface="Calibri" pitchFamily="34" charset="-122"/>
+                <a:cs typeface="Calibri" pitchFamily="34" charset="-120"/>
+              </a:rPr>
+              <a:t>REJECT</a:t>
+            </a:r>
+            <a:endParaRPr lang="en-US" sz="1100" dirty="0"/>
+          </a:p>
+        </p:txBody>
+      </p:sp>
+      <p:sp>
+        <p:nvSpPr>
+          <p:cNvPr id="40" name="Text 38"/>
+          <p:cNvSpPr txBox="1"/>
+          <p:nvPr/>
+        </p:nvSpPr>
+        <p:spPr>
+          <a:xfrm>
+            <a:off x="8183880" y="5532120"/>
+            <a:ext cx="2377440" cy="292608"/>
+          </a:xfrm>
+          <a:prstGeom prst="rect">
+            <a:avLst/>
+          </a:prstGeom>
+          <a:noFill/>
+          <a:ln/>
+        </p:spPr>
+        <p:txBody>
+          <a:bodyPr wrap="square" lIns="0" tIns="0" rIns="0" bIns="0" rtlCol="0" anchor="ctr"/>
+          <a:lstStyle/>
+          <a:p>
+            <a:pPr indent="0" marL="0">
+              <a:buNone/>
+            </a:pPr>
+            <a:r>
+              <a:rPr lang="en-US" sz="1100" b="1" dirty="0">
+                <a:solidFill>
+                  <a:srgbClr val="3FBE6B"/>
+                </a:solidFill>
+                <a:latin typeface="Calibri" pitchFamily="34" charset="0"/>
+                <a:ea typeface="Calibri" pitchFamily="34" charset="-122"/>
+                <a:cs typeface="Calibri" pitchFamily="34" charset="-120"/>
+              </a:rPr>
+              <a:t>REJECT</a:t>
+            </a:r>
+            <a:endParaRPr lang="en-US" sz="1100" dirty="0"/>
+          </a:p>
+        </p:txBody>
+      </p:sp>
+      <p:sp>
+        <p:nvSpPr>
+          <p:cNvPr id="41" name="Shape 39"/>
+          <p:cNvSpPr/>
+          <p:nvPr/>
+        </p:nvSpPr>
+        <p:spPr>
+          <a:xfrm>
+            <a:off x="548640" y="5843016"/>
+            <a:ext cx="10177272" cy="338328"/>
+          </a:xfrm>
+          <a:prstGeom prst="roundRect">
+            <a:avLst>
+              <a:gd name="adj" fmla="val 16216"/>
+            </a:avLst>
+          </a:prstGeom>
+          <a:solidFill>
+            <a:srgbClr val="242424"/>
+          </a:solidFill>
+          <a:ln/>
+        </p:spPr>
+      </p:sp>
+      <p:sp>
+        <p:nvSpPr>
+          <p:cNvPr id="42" name="Text 40"/>
+          <p:cNvSpPr txBox="1"/>
+          <p:nvPr/>
+        </p:nvSpPr>
+        <p:spPr>
+          <a:xfrm>
+            <a:off x="777240" y="5925312"/>
+            <a:ext cx="5120640" cy="292608"/>
+          </a:xfrm>
+          <a:prstGeom prst="rect">
+            <a:avLst/>
+          </a:prstGeom>
+          <a:noFill/>
+          <a:ln/>
+        </p:spPr>
+        <p:txBody>
+          <a:bodyPr wrap="square" lIns="0" tIns="0" rIns="0" bIns="0" rtlCol="0" anchor="ctr"/>
+          <a:lstStyle/>
+          <a:p>
+            <a:pPr indent="0" marL="0">
+              <a:buNone/>
+            </a:pPr>
+            <a:r>
+              <a:rPr lang="en-US" sz="1100" dirty="0">
+                <a:solidFill>
+                  <a:srgbClr val="FFFFFF"/>
+                </a:solidFill>
+                <a:latin typeface="Calibri" pitchFamily="34" charset="0"/>
+                <a:ea typeface="Calibri" pitchFamily="34" charset="-122"/>
+                <a:cs typeface="Calibri" pitchFamily="34" charset="-120"/>
+              </a:rPr>
+              <a:t>Back of card (no face on it)</a:t>
+            </a:r>
+            <a:endParaRPr lang="en-US" sz="1100" dirty="0"/>
+          </a:p>
+        </p:txBody>
+      </p:sp>
+      <p:sp>
+        <p:nvSpPr>
+          <p:cNvPr id="43" name="Text 41"/>
+          <p:cNvSpPr txBox="1"/>
+          <p:nvPr/>
+        </p:nvSpPr>
+        <p:spPr>
+          <a:xfrm>
+            <a:off x="5989320" y="5925312"/>
+            <a:ext cx="2103120" cy="292608"/>
+          </a:xfrm>
+          <a:prstGeom prst="rect">
+            <a:avLst/>
+          </a:prstGeom>
+          <a:noFill/>
+          <a:ln/>
+        </p:spPr>
+        <p:txBody>
+          <a:bodyPr wrap="square" lIns="0" tIns="0" rIns="0" bIns="0" rtlCol="0" anchor="ctr"/>
+          <a:lstStyle/>
+          <a:p>
+            <a:pPr indent="0" marL="0">
+              <a:buNone/>
+            </a:pPr>
+            <a:r>
+              <a:rPr lang="en-US" sz="1100" b="1" dirty="0">
+                <a:solidFill>
+                  <a:srgbClr val="9A9A9A"/>
+                </a:solidFill>
+                <a:latin typeface="Calibri" pitchFamily="34" charset="0"/>
+                <a:ea typeface="Calibri" pitchFamily="34" charset="-122"/>
+                <a:cs typeface="Calibri" pitchFamily="34" charset="-120"/>
+              </a:rPr>
+              <a:t>REVIEW</a:t>
+            </a:r>
+            <a:endParaRPr lang="en-US" sz="1100" dirty="0"/>
+          </a:p>
+        </p:txBody>
+      </p:sp>
+      <p:sp>
+        <p:nvSpPr>
+          <p:cNvPr id="44" name="Text 42"/>
+          <p:cNvSpPr txBox="1"/>
+          <p:nvPr/>
+        </p:nvSpPr>
+        <p:spPr>
+          <a:xfrm>
+            <a:off x="8183880" y="5925312"/>
+            <a:ext cx="2377440" cy="292608"/>
+          </a:xfrm>
+          <a:prstGeom prst="rect">
+            <a:avLst/>
+          </a:prstGeom>
+          <a:noFill/>
+          <a:ln/>
+        </p:spPr>
+        <p:txBody>
+          <a:bodyPr wrap="square" lIns="0" tIns="0" rIns="0" bIns="0" rtlCol="0" anchor="ctr"/>
+          <a:lstStyle/>
+          <a:p>
+            <a:pPr indent="0" marL="0">
+              <a:buNone/>
+            </a:pPr>
+            <a:r>
+              <a:rPr lang="en-US" sz="1100" b="1" dirty="0">
+                <a:solidFill>
+                  <a:srgbClr val="3FBE6B"/>
+                </a:solidFill>
+                <a:latin typeface="Calibri" pitchFamily="34" charset="0"/>
+                <a:ea typeface="Calibri" pitchFamily="34" charset="-122"/>
+                <a:cs typeface="Calibri" pitchFamily="34" charset="-120"/>
+              </a:rPr>
+              <a:t>REVIEW</a:t>
+            </a:r>
+            <a:endParaRPr lang="en-US" sz="1100" dirty="0"/>
+          </a:p>
+        </p:txBody>
+      </p:sp>
+      <p:sp>
+        <p:nvSpPr>
+          <p:cNvPr id="45" name="Text 43"/>
+          <p:cNvSpPr txBox="1"/>
+          <p:nvPr/>
+        </p:nvSpPr>
+        <p:spPr>
+          <a:xfrm>
+            <a:off x="548640" y="6345936"/>
+            <a:ext cx="10177272" cy="457200"/>
+          </a:xfrm>
+          <a:prstGeom prst="rect">
+            <a:avLst/>
+          </a:prstGeom>
+          <a:noFill/>
+          <a:ln/>
+        </p:spPr>
+        <p:txBody>
+          <a:bodyPr wrap="square" lIns="0" tIns="0" rIns="0" bIns="0" rtlCol="0" anchor="ctr"/>
+          <a:lstStyle/>
+          <a:p>
+            <a:pPr indent="0" marL="0">
+              <a:lnSpc>
+                <a:spcPct val="120000"/>
+              </a:lnSpc>
+              <a:buNone/>
+            </a:pPr>
+            <a:r>
+              <a:rPr lang="en-US" sz="1100" i="1" dirty="0">
+                <a:solidFill>
+                  <a:srgbClr val="9A9A9A"/>
+                </a:solidFill>
+                <a:latin typeface="Calibri" pitchFamily="34" charset="0"/>
+                <a:ea typeface="Calibri" pitchFamily="34" charset="-122"/>
+                <a:cs typeface="Calibri" pitchFamily="34" charset="-120"/>
+              </a:rPr>
+              <a:t>The two red rows are fakes our own system was accepting. We only found them by testing against real captures instead of trusting the model's own score.</a:t>
+            </a:r>
+            <a:endParaRPr lang="en-US" sz="1100" dirty="0"/>
+          </a:p>
+        </p:txBody>
+      </p:sp>
+      <p:sp>
+        <p:nvSpPr>
+          <p:cNvPr id="46" name="Text 44"/>
           <p:cNvSpPr txBox="1"/>
           <p:nvPr/>
         </p:nvSpPr>
@@ -7301,7 +8959,7 @@
                 <a:ea typeface="Calibri" pitchFamily="34" charset="-122"/>
                 <a:cs typeface="Calibri" pitchFamily="34" charset="-120"/>
               </a:rPr>
-              <a:t>7 / 8</a:t>
+              <a:t>7 / 9</a:t>
             </a:r>
             <a:endParaRPr lang="en-US" sz="1000" dirty="0"/>
           </a:p>
@@ -7365,7 +9023,7 @@
                 <a:ea typeface="Calibri" pitchFamily="34" charset="-122"/>
                 <a:cs typeface="Calibri" pitchFamily="34" charset="-120"/>
               </a:rPr>
-              <a:t>LIVE DEMO</a:t>
+              <a:t>THE RESEARCH BEHIND IT</a:t>
             </a:r>
             <a:endParaRPr lang="en-US" sz="1300" dirty="0"/>
           </a:p>
@@ -7399,7 +9057,7 @@
               <a:buNone/>
             </a:pPr>
             <a:r>
-              <a:rPr lang="en-US" sz="3200" b="1" dirty="0">
+              <a:rPr lang="en-US" sz="3000" b="1" dirty="0">
                 <a:solidFill>
                   <a:srgbClr val="FFFFFF"/>
                 </a:solidFill>
@@ -7407,9 +9065,9 @@
                 <a:ea typeface="Cambria" pitchFamily="34" charset="-122"/>
                 <a:cs typeface="Cambria" pitchFamily="34" charset="-120"/>
               </a:rPr>
-              <a:t>See it in action</a:t>
-            </a:r>
-            <a:endParaRPr lang="en-US" sz="3200" dirty="0"/>
+              <a:t>Why we test this way</a:t>
+            </a:r>
+            <a:endParaRPr lang="en-US" sz="3000" dirty="0"/>
           </a:p>
         </p:txBody>
       </p:sp>
@@ -7422,11 +9080,11 @@
         <p:spPr>
           <a:xfrm>
             <a:off x="548640" y="1920240"/>
-            <a:ext cx="10177272" cy="4023360"/>
+            <a:ext cx="10177272" cy="3566160"/>
           </a:xfrm>
           <a:prstGeom prst="roundRect">
             <a:avLst>
-              <a:gd name="adj" fmla="val 2273"/>
+              <a:gd name="adj" fmla="val 2564"/>
             </a:avLst>
           </a:prstGeom>
           <a:solidFill>
@@ -7448,6 +9106,259 @@
         </p:nvSpPr>
         <p:spPr>
           <a:xfrm>
+            <a:off x="548640" y="3474720"/>
+            <a:ext cx="10177272" cy="457200"/>
+          </a:xfrm>
+          <a:prstGeom prst="rect">
+            <a:avLst/>
+          </a:prstGeom>
+          <a:noFill/>
+          <a:ln/>
+        </p:spPr>
+        <p:txBody>
+          <a:bodyPr wrap="square" lIns="0" tIns="0" rIns="0" bIns="0" rtlCol="0" anchor="ctr"/>
+          <a:lstStyle/>
+          <a:p>
+            <a:pPr algn="ctr" indent="0" marL="0">
+              <a:buNone/>
+            </a:pPr>
+            <a:r>
+              <a:rPr lang="en-US" sz="1300" i="1" dirty="0">
+                <a:solidFill>
+                  <a:srgbClr val="6B6B6B"/>
+                </a:solidFill>
+                <a:latin typeface="Calibri" pitchFamily="34" charset="0"/>
+                <a:ea typeface="Calibri" pitchFamily="34" charset="-122"/>
+                <a:cs typeface="Calibri" pitchFamily="34" charset="-120"/>
+              </a:rPr>
+              <a:t>[ paste paper figure / screenshot here ]</a:t>
+            </a:r>
+            <a:endParaRPr lang="en-US" sz="1300" dirty="0"/>
+          </a:p>
+        </p:txBody>
+      </p:sp>
+      <p:sp>
+        <p:nvSpPr>
+          <p:cNvPr id="6" name="Text 4"/>
+          <p:cNvSpPr txBox="1"/>
+          <p:nvPr/>
+        </p:nvSpPr>
+        <p:spPr>
+          <a:xfrm>
+            <a:off x="548640" y="5623560"/>
+            <a:ext cx="10177272" cy="777240"/>
+          </a:xfrm>
+          <a:prstGeom prst="rect">
+            <a:avLst/>
+          </a:prstGeom>
+          <a:noFill/>
+          <a:ln/>
+        </p:spPr>
+        <p:txBody>
+          <a:bodyPr wrap="square" lIns="0" tIns="0" rIns="0" bIns="0" rtlCol="0" anchor="ctr"/>
+          <a:lstStyle/>
+          <a:p>
+            <a:pPr indent="0" marL="0">
+              <a:lnSpc>
+                <a:spcPct val="130000"/>
+              </a:lnSpc>
+              <a:buNone/>
+            </a:pPr>
+            <a:r>
+              <a:rPr lang="en-US" sz="1300" dirty="0">
+                <a:solidFill>
+                  <a:srgbClr val="9A9A9A"/>
+                </a:solidFill>
+                <a:latin typeface="Calibri" pitchFamily="34" charset="0"/>
+                <a:ea typeface="Calibri" pitchFamily="34" charset="-122"/>
+                <a:cs typeface="Calibri" pitchFamily="34" charset="-120"/>
+              </a:rPr>
+              <a:t>arXiv 2602.00192 — most AI-photo detectors get fooled once an edit is pasted into a real photo, not the AI content itself. That's the exact trick we built and test our checks against.</a:t>
+            </a:r>
+            <a:endParaRPr lang="en-US" sz="1300" dirty="0"/>
+          </a:p>
+        </p:txBody>
+      </p:sp>
+      <p:sp>
+        <p:nvSpPr>
+          <p:cNvPr id="7" name="Text 5"/>
+          <p:cNvSpPr txBox="1"/>
+          <p:nvPr/>
+        </p:nvSpPr>
+        <p:spPr>
+          <a:xfrm>
+            <a:off x="11183112" y="6473952"/>
+            <a:ext cx="822960" cy="274320"/>
+          </a:xfrm>
+          <a:prstGeom prst="rect">
+            <a:avLst/>
+          </a:prstGeom>
+          <a:noFill/>
+          <a:ln/>
+        </p:spPr>
+        <p:txBody>
+          <a:bodyPr wrap="square" lIns="0" tIns="0" rIns="0" bIns="0" rtlCol="0" anchor="ctr"/>
+          <a:lstStyle/>
+          <a:p>
+            <a:pPr algn="r" indent="0" marL="0">
+              <a:buNone/>
+            </a:pPr>
+            <a:r>
+              <a:rPr lang="en-US" sz="1000" dirty="0">
+                <a:solidFill>
+                  <a:srgbClr val="6B6B6B"/>
+                </a:solidFill>
+                <a:latin typeface="Calibri" pitchFamily="34" charset="0"/>
+                <a:ea typeface="Calibri" pitchFamily="34" charset="-122"/>
+                <a:cs typeface="Calibri" pitchFamily="34" charset="-120"/>
+              </a:rPr>
+              <a:t>8 / 9</a:t>
+            </a:r>
+            <a:endParaRPr lang="en-US" sz="1000" dirty="0"/>
+          </a:p>
+        </p:txBody>
+      </p:sp>
+    </p:spTree>
+  </p:cSld>
+  <p:clrMapOvr>
+    <a:masterClrMapping/>
+  </p:clrMapOvr>
+</p:sld>
+</file>
+
+<file path=ppt/slides/slide9.xml><?xml version="1.0" encoding="utf-8"?>
+<p:sld xmlns:a="http://schemas.openxmlformats.org/drawingml/2006/main" xmlns:r="http://schemas.openxmlformats.org/officeDocument/2006/relationships" xmlns:p="http://schemas.openxmlformats.org/presentationml/2006/main">
+  <p:cSld name="Slide 9">
+    <p:spTree>
+      <p:nvGrpSpPr>
+        <p:cNvPr id="1" name=""/>
+        <p:cNvGrpSpPr/>
+        <p:nvPr/>
+      </p:nvGrpSpPr>
+      <p:grpSpPr>
+        <a:xfrm>
+          <a:off x="0" y="0"/>
+          <a:ext cx="0" cy="0"/>
+          <a:chOff x="0" y="0"/>
+          <a:chExt cx="0" cy="0"/>
+        </a:xfrm>
+      </p:grpSpPr>
+      <p:sp>
+        <p:nvSpPr>
+          <p:cNvPr id="2" name="Text 0"/>
+          <p:cNvSpPr txBox="1"/>
+          <p:nvPr/>
+        </p:nvSpPr>
+        <p:spPr>
+          <a:xfrm>
+            <a:off x="548640" y="457200"/>
+            <a:ext cx="8229600" cy="320040"/>
+          </a:xfrm>
+          <a:prstGeom prst="rect">
+            <a:avLst/>
+          </a:prstGeom>
+          <a:noFill/>
+          <a:ln/>
+        </p:spPr>
+        <p:txBody>
+          <a:bodyPr wrap="square" lIns="0" tIns="0" rIns="0" bIns="0" rtlCol="0" anchor="ctr"/>
+          <a:lstStyle/>
+          <a:p>
+            <a:pPr indent="0" marL="0">
+              <a:buNone/>
+            </a:pPr>
+            <a:r>
+              <a:rPr lang="en-US" sz="1300" b="1" spc="200" kern="0" dirty="0">
+                <a:solidFill>
+                  <a:srgbClr val="FFC627"/>
+                </a:solidFill>
+                <a:latin typeface="Calibri" pitchFamily="34" charset="0"/>
+                <a:ea typeface="Calibri" pitchFamily="34" charset="-122"/>
+                <a:cs typeface="Calibri" pitchFamily="34" charset="-120"/>
+              </a:rPr>
+              <a:t>LIVE DEMO</a:t>
+            </a:r>
+            <a:endParaRPr lang="en-US" sz="1300" dirty="0"/>
+          </a:p>
+        </p:txBody>
+      </p:sp>
+      <p:sp>
+        <p:nvSpPr>
+          <p:cNvPr id="3" name="Text 1"/>
+          <p:cNvSpPr txBox="1"/>
+          <p:nvPr/>
+        </p:nvSpPr>
+        <p:spPr>
+          <a:xfrm>
+            <a:off x="548640" y="786384"/>
+            <a:ext cx="10515600" cy="1280160"/>
+          </a:xfrm>
+          <a:prstGeom prst="rect">
+            <a:avLst/>
+          </a:prstGeom>
+          <a:noFill/>
+          <a:ln/>
+        </p:spPr>
+        <p:txBody>
+          <a:bodyPr wrap="square" lIns="0" tIns="0" rIns="0" bIns="0" rtlCol="0" anchor="ctr"/>
+          <a:lstStyle/>
+          <a:p>
+            <a:pPr indent="0" marL="0">
+              <a:lnSpc>
+                <a:spcPct val="105000"/>
+              </a:lnSpc>
+              <a:buNone/>
+            </a:pPr>
+            <a:r>
+              <a:rPr lang="en-US" sz="3200" b="1" dirty="0">
+                <a:solidFill>
+                  <a:srgbClr val="FFFFFF"/>
+                </a:solidFill>
+                <a:latin typeface="Cambria" pitchFamily="34" charset="0"/>
+                <a:ea typeface="Cambria" pitchFamily="34" charset="-122"/>
+                <a:cs typeface="Cambria" pitchFamily="34" charset="-120"/>
+              </a:rPr>
+              <a:t>See it in action</a:t>
+            </a:r>
+            <a:endParaRPr lang="en-US" sz="3200" dirty="0"/>
+          </a:p>
+        </p:txBody>
+      </p:sp>
+      <p:sp>
+        <p:nvSpPr>
+          <p:cNvPr id="4" name="Shape 2"/>
+          <p:cNvSpPr/>
+          <p:nvPr/>
+        </p:nvSpPr>
+        <p:spPr>
+          <a:xfrm>
+            <a:off x="548640" y="1920240"/>
+            <a:ext cx="10177272" cy="4023360"/>
+          </a:xfrm>
+          <a:prstGeom prst="roundRect">
+            <a:avLst>
+              <a:gd name="adj" fmla="val 2273"/>
+            </a:avLst>
+          </a:prstGeom>
+          <a:solidFill>
+            <a:srgbClr val="1B1B1B"/>
+          </a:solidFill>
+          <a:ln w="15875">
+            <a:solidFill>
+              <a:srgbClr val="C99A0E"/>
+            </a:solidFill>
+            <a:prstDash val="dash"/>
+          </a:ln>
+        </p:spPr>
+      </p:sp>
+      <p:sp>
+        <p:nvSpPr>
+          <p:cNvPr id="5" name="Text 3"/>
+          <p:cNvSpPr txBox="1"/>
+          <p:nvPr/>
+        </p:nvSpPr>
+        <p:spPr>
+          <a:xfrm>
             <a:off x="548640" y="3703320"/>
             <a:ext cx="10177272" cy="457200"/>
           </a:xfrm>
@@ -7551,7 +9462,7 @@
                 <a:ea typeface="Calibri" pitchFamily="34" charset="-122"/>
                 <a:cs typeface="Calibri" pitchFamily="34" charset="-120"/>
               </a:rPr>
-              <a:t>8 / 8</a:t>
+              <a:t>9 / 9</a:t>
             </a:r>
             <a:endParaRPr lang="en-US" sz="1000" dirty="0"/>
           </a:p>
